--- a/public/resources/CodSphere_Company_Overview.pptx
+++ b/public/resources/CodSphere_Company_Overview.pptx
@@ -3110,7 +3110,7 @@
             <a:avLst/>
           </a:prstGeom>
           <a:solidFill>
-            <a:srgbClr val="FFFFFF"/>
+            <a:srgbClr val="000000"/>
           </a:solidFill>
           <a:ln>
             <a:noFill/>
@@ -3146,8 +3146,177 @@
         </p:nvSpPr>
         <p:spPr>
           <a:xfrm>
-            <a:off x="0" y="0"/>
-            <a:ext cx="12191695" cy="73152"/>
+            <a:off x="7772400" y="4114800"/>
+            <a:ext cx="4480560" cy="2743200"/>
+          </a:xfrm>
+          <a:prstGeom prst="rect">
+            <a:avLst/>
+          </a:prstGeom>
+          <a:solidFill>
+            <a:srgbClr val="010B66"/>
+          </a:solidFill>
+          <a:ln>
+            <a:noFill/>
+          </a:ln>
+        </p:spPr>
+        <p:style>
+          <a:lnRef idx="1">
+            <a:schemeClr val="accent1"/>
+          </a:lnRef>
+          <a:fillRef idx="3">
+            <a:schemeClr val="accent1"/>
+          </a:fillRef>
+          <a:effectRef idx="2">
+            <a:schemeClr val="accent1"/>
+          </a:effectRef>
+          <a:fontRef idx="minor">
+            <a:schemeClr val="lt1"/>
+          </a:fontRef>
+        </p:style>
+        <p:txBody>
+          <a:bodyPr rtlCol="0" anchor="ctr"/>
+          <a:lstStyle/>
+          <a:p>
+            <a:pPr algn="ctr"/>
+          </a:p>
+        </p:txBody>
+      </p:sp>
+      <p:pic>
+        <p:nvPicPr>
+          <p:cNvPr id="4" name="Picture 3" descr="logo-white.png"/>
+          <p:cNvPicPr>
+            <a:picLocks noChangeAspect="1"/>
+          </p:cNvPicPr>
+          <p:nvPr/>
+        </p:nvPicPr>
+        <p:blipFill>
+          <a:blip r:embed="rId2"/>
+          <a:stretch>
+            <a:fillRect/>
+          </a:stretch>
+        </p:blipFill>
+        <p:spPr>
+          <a:xfrm>
+            <a:off x="640080" y="502920"/>
+            <a:ext cx="1550051" cy="347472"/>
+          </a:xfrm>
+          <a:prstGeom prst="rect">
+            <a:avLst/>
+          </a:prstGeom>
+        </p:spPr>
+      </p:pic>
+      <p:sp>
+        <p:nvSpPr>
+          <p:cNvPr id="5" name="TextBox 4"/>
+          <p:cNvSpPr txBox="1"/>
+          <p:nvPr/>
+        </p:nvSpPr>
+        <p:spPr>
+          <a:xfrm>
+            <a:off x="640080" y="2011680"/>
+            <a:ext cx="10058400" cy="320040"/>
+          </a:xfrm>
+          <a:prstGeom prst="rect">
+            <a:avLst/>
+          </a:prstGeom>
+          <a:noFill/>
+        </p:spPr>
+        <p:txBody>
+          <a:bodyPr wrap="none">
+            <a:spAutoFit/>
+          </a:bodyPr>
+          <a:lstStyle/>
+          <a:p>
+            <a:r>
+              <a:rPr sz="1400" b="1">
+                <a:solidFill>
+                  <a:srgbClr val="33FCFE"/>
+                </a:solidFill>
+                <a:latin typeface="Calibri"/>
+              </a:rPr>
+              <a:t>Company overview</a:t>
+            </a:r>
+          </a:p>
+        </p:txBody>
+      </p:sp>
+      <p:sp>
+        <p:nvSpPr>
+          <p:cNvPr id="6" name="TextBox 5"/>
+          <p:cNvSpPr txBox="1"/>
+          <p:nvPr/>
+        </p:nvSpPr>
+        <p:spPr>
+          <a:xfrm>
+            <a:off x="640080" y="2377440"/>
+            <a:ext cx="10058400" cy="731520"/>
+          </a:xfrm>
+          <a:prstGeom prst="rect">
+            <a:avLst/>
+          </a:prstGeom>
+          <a:noFill/>
+        </p:spPr>
+        <p:txBody>
+          <a:bodyPr wrap="none">
+            <a:spAutoFit/>
+          </a:bodyPr>
+          <a:lstStyle/>
+          <a:p>
+            <a:r>
+              <a:rPr sz="4800" b="1">
+                <a:solidFill>
+                  <a:srgbClr val="FFFFFF"/>
+                </a:solidFill>
+                <a:latin typeface="Calibri"/>
+              </a:rPr>
+              <a:t>CodSphere</a:t>
+            </a:r>
+          </a:p>
+        </p:txBody>
+      </p:sp>
+      <p:sp>
+        <p:nvSpPr>
+          <p:cNvPr id="7" name="TextBox 6"/>
+          <p:cNvSpPr txBox="1"/>
+          <p:nvPr/>
+        </p:nvSpPr>
+        <p:spPr>
+          <a:xfrm>
+            <a:off x="640080" y="3200400"/>
+            <a:ext cx="9144000" cy="914400"/>
+          </a:xfrm>
+          <a:prstGeom prst="rect">
+            <a:avLst/>
+          </a:prstGeom>
+          <a:noFill/>
+        </p:spPr>
+        <p:txBody>
+          <a:bodyPr wrap="square">
+            <a:spAutoFit/>
+          </a:bodyPr>
+          <a:lstStyle/>
+          <a:p>
+            <a:r>
+              <a:rPr sz="2000" b="0">
+                <a:solidFill>
+                  <a:srgbClr val="FFFFFF"/>
+                </a:solidFill>
+                <a:latin typeface="Calibri"/>
+              </a:rPr>
+              <a:t>Commerce and order operations for businesses where every order is customized.</a:t>
+            </a:r>
+          </a:p>
+        </p:txBody>
+      </p:sp>
+      <p:sp>
+        <p:nvSpPr>
+          <p:cNvPr id="8" name="Rectangle 7"/>
+          <p:cNvSpPr/>
+          <p:nvPr/>
+        </p:nvSpPr>
+        <p:spPr>
+          <a:xfrm>
+            <a:off x="640080" y="4160520"/>
+            <a:ext cx="822960" cy="27432"/>
           </a:xfrm>
           <a:prstGeom prst="rect">
             <a:avLst/>
@@ -3183,20 +3352,20 @@
       </p:sp>
       <p:sp>
         <p:nvSpPr>
-          <p:cNvPr id="4" name="Rectangle 3"/>
+          <p:cNvPr id="9" name="Rectangle 8"/>
           <p:cNvSpPr/>
           <p:nvPr/>
         </p:nvSpPr>
         <p:spPr>
           <a:xfrm>
-            <a:off x="5943600" y="0"/>
-            <a:ext cx="6248095" cy="73152"/>
+            <a:off x="0" y="6263640"/>
+            <a:ext cx="12191695" cy="594360"/>
           </a:xfrm>
           <a:prstGeom prst="rect">
             <a:avLst/>
           </a:prstGeom>
           <a:solidFill>
-            <a:srgbClr val="010B66"/>
+            <a:srgbClr val="000000"/>
           </a:solidFill>
           <a:ln>
             <a:noFill/>
@@ -3226,13 +3395,13 @@
       </p:sp>
       <p:sp>
         <p:nvSpPr>
-          <p:cNvPr id="5" name="TextBox 4"/>
+          <p:cNvPr id="10" name="TextBox 9"/>
           <p:cNvSpPr txBox="1"/>
           <p:nvPr/>
         </p:nvSpPr>
         <p:spPr>
           <a:xfrm>
-            <a:off x="640080" y="457200"/>
+            <a:off x="640080" y="6400800"/>
             <a:ext cx="10972800" cy="320040"/>
           </a:xfrm>
           <a:prstGeom prst="rect">
@@ -3247,401 +3416,13 @@
           <a:lstStyle/>
           <a:p>
             <a:r>
-              <a:rPr sz="1200" b="1">
-                <a:solidFill>
-                  <a:srgbClr val="0664A7"/>
-                </a:solidFill>
-                <a:latin typeface="Calibri"/>
-              </a:rPr>
-              <a:t>CODSPHERE</a:t>
-            </a:r>
-          </a:p>
-        </p:txBody>
-      </p:sp>
-      <p:sp>
-        <p:nvSpPr>
-          <p:cNvPr id="6" name="TextBox 5"/>
-          <p:cNvSpPr txBox="1"/>
-          <p:nvPr/>
-        </p:nvSpPr>
-        <p:spPr>
-          <a:xfrm>
-            <a:off x="640080" y="822960"/>
-            <a:ext cx="10972800" cy="1188720"/>
-          </a:xfrm>
-          <a:prstGeom prst="rect">
-            <a:avLst/>
-          </a:prstGeom>
-          <a:noFill/>
-        </p:spPr>
-        <p:txBody>
-          <a:bodyPr wrap="square">
-            <a:spAutoFit/>
-          </a:bodyPr>
-          <a:lstStyle/>
-          <a:p>
-            <a:r>
-              <a:rPr sz="4000" b="1">
-                <a:solidFill>
-                  <a:srgbClr val="0A0A0A"/>
-                </a:solidFill>
-                <a:latin typeface="Calibri"/>
-              </a:rPr>
-              <a:t>Sell custom work online.
-Track every job.</a:t>
-            </a:r>
-          </a:p>
-        </p:txBody>
-      </p:sp>
-      <p:sp>
-        <p:nvSpPr>
-          <p:cNvPr id="7" name="TextBox 6"/>
-          <p:cNvSpPr txBox="1"/>
-          <p:nvPr/>
-        </p:nvSpPr>
-        <p:spPr>
-          <a:xfrm>
-            <a:off x="640080" y="2148840"/>
-            <a:ext cx="10972800" cy="1005840"/>
-          </a:xfrm>
-          <a:prstGeom prst="rect">
-            <a:avLst/>
-          </a:prstGeom>
-          <a:noFill/>
-        </p:spPr>
-        <p:txBody>
-          <a:bodyPr wrap="square">
-            <a:spAutoFit/>
-          </a:bodyPr>
-          <a:lstStyle/>
-          <a:p>
-            <a:r>
-              <a:rPr sz="2000" b="0">
-                <a:solidFill>
-                  <a:srgbClr val="5A6472"/>
-                </a:solidFill>
-                <a:latin typeface="Calibri"/>
-              </a:rPr>
-              <a:t>Commerce and order operations for businesses where every order is customized for the customer.</a:t>
-            </a:r>
-          </a:p>
-        </p:txBody>
-      </p:sp>
-      <p:sp>
-        <p:nvSpPr>
-          <p:cNvPr id="8" name="Rounded Rectangle 7">
-            <a:hlinkClick r:id="rId2"/>
-          </p:cNvPr>
-          <p:cNvSpPr/>
-          <p:nvPr/>
-        </p:nvSpPr>
-        <p:spPr>
-          <a:xfrm>
-            <a:off x="640080" y="3200400"/>
-            <a:ext cx="3291840" cy="502920"/>
-          </a:xfrm>
-          <a:prstGeom prst="roundRect">
-            <a:avLst>
-              <a:gd name="adj" fmla="val 50000"/>
-            </a:avLst>
-          </a:prstGeom>
-          <a:solidFill>
-            <a:srgbClr val="010B66"/>
-          </a:solidFill>
-          <a:ln>
-            <a:noFill/>
-          </a:ln>
-        </p:spPr>
-        <p:style>
-          <a:lnRef idx="1">
-            <a:schemeClr val="accent1"/>
-          </a:lnRef>
-          <a:fillRef idx="3">
-            <a:schemeClr val="accent1"/>
-          </a:fillRef>
-          <a:effectRef idx="2">
-            <a:schemeClr val="accent1"/>
-          </a:effectRef>
-          <a:fontRef idx="minor">
-            <a:schemeClr val="lt1"/>
-          </a:fontRef>
-        </p:style>
-        <p:txBody>
-          <a:bodyPr rtlCol="0" anchor="ctr" wrap="none"/>
-          <a:lstStyle/>
-          <a:p>
-            <a:pPr algn="ctr"/>
-            <a:r>
-              <a:rPr sz="1400" b="1">
-                <a:solidFill>
-                  <a:srgbClr val="FFFFFF"/>
-                </a:solidFill>
-                <a:latin typeface="Calibri"/>
-              </a:rPr>
-              <a:t>Show us your order flow →</a:t>
-            </a:r>
-          </a:p>
-        </p:txBody>
-      </p:sp>
-      <p:sp>
-        <p:nvSpPr>
-          <p:cNvPr id="9" name="Rounded Rectangle 8">
-            <a:hlinkClick r:id="rId3"/>
-          </p:cNvPr>
-          <p:cNvSpPr/>
-          <p:nvPr/>
-        </p:nvSpPr>
-        <p:spPr>
-          <a:xfrm>
-            <a:off x="4114800" y="3200400"/>
-            <a:ext cx="2560320" cy="502920"/>
-          </a:xfrm>
-          <a:prstGeom prst="roundRect">
-            <a:avLst>
-              <a:gd name="adj" fmla="val 50000"/>
-            </a:avLst>
-          </a:prstGeom>
-          <a:solidFill>
-            <a:srgbClr val="FFFFFF"/>
-          </a:solidFill>
-          <a:ln w="19050">
-            <a:solidFill>
-              <a:srgbClr val="010B66"/>
-            </a:solidFill>
-          </a:ln>
-        </p:spPr>
-        <p:style>
-          <a:lnRef idx="1">
-            <a:schemeClr val="accent1"/>
-          </a:lnRef>
-          <a:fillRef idx="3">
-            <a:schemeClr val="accent1"/>
-          </a:fillRef>
-          <a:effectRef idx="2">
-            <a:schemeClr val="accent1"/>
-          </a:effectRef>
-          <a:fontRef idx="minor">
-            <a:schemeClr val="lt1"/>
-          </a:fontRef>
-        </p:style>
-        <p:txBody>
-          <a:bodyPr rtlCol="0" anchor="ctr" wrap="none"/>
-          <a:lstStyle/>
-          <a:p>
-            <a:pPr algn="ctr"/>
-            <a:r>
-              <a:rPr sz="1400" b="1">
-                <a:solidFill>
-                  <a:srgbClr val="010B66"/>
-                </a:solidFill>
-                <a:latin typeface="Calibri"/>
-              </a:rPr>
-              <a:t>www.codsphere.com →</a:t>
-            </a:r>
-          </a:p>
-        </p:txBody>
-      </p:sp>
-      <p:sp>
-        <p:nvSpPr>
-          <p:cNvPr id="10" name="TextBox 9"/>
-          <p:cNvSpPr txBox="1"/>
-          <p:nvPr/>
-        </p:nvSpPr>
-        <p:spPr>
-          <a:xfrm>
-            <a:off x="640080" y="3977639"/>
-            <a:ext cx="10972800" cy="1005840"/>
-          </a:xfrm>
-          <a:prstGeom prst="rect">
-            <a:avLst/>
-          </a:prstGeom>
-          <a:noFill/>
-        </p:spPr>
-        <p:txBody>
-          <a:bodyPr wrap="square">
-            <a:spAutoFit/>
-          </a:bodyPr>
-          <a:lstStyle/>
-          <a:p>
-            <a:r>
-              <a:rPr sz="1500" b="0">
-                <a:solidFill>
-                  <a:srgbClr val="5A6472"/>
-                </a:solidFill>
-                <a:latin typeface="Calibri"/>
-              </a:rPr>
-              <a:t>Vancouver · Canada · (604) 906-2693 · info@codsphere.ca</a:t>
-            </a:r>
-          </a:p>
-        </p:txBody>
-      </p:sp>
-      <p:sp>
-        <p:nvSpPr>
-          <p:cNvPr id="11" name="Rounded Rectangle 10"/>
-          <p:cNvSpPr/>
-          <p:nvPr/>
-        </p:nvSpPr>
-        <p:spPr>
-          <a:xfrm>
-            <a:off x="640080" y="4572000"/>
-            <a:ext cx="10698480" cy="1234440"/>
-          </a:xfrm>
-          <a:prstGeom prst="roundRect">
-            <a:avLst>
-              <a:gd name="adj" fmla="val 8000"/>
-            </a:avLst>
-          </a:prstGeom>
-          <a:solidFill>
-            <a:srgbClr val="F6F7F9"/>
-          </a:solidFill>
-          <a:ln w="12700">
-            <a:solidFill>
-              <a:srgbClr val="E8EAED"/>
-            </a:solidFill>
-          </a:ln>
-        </p:spPr>
-        <p:style>
-          <a:lnRef idx="1">
-            <a:schemeClr val="accent1"/>
-          </a:lnRef>
-          <a:fillRef idx="3">
-            <a:schemeClr val="accent1"/>
-          </a:fillRef>
-          <a:effectRef idx="2">
-            <a:schemeClr val="accent1"/>
-          </a:effectRef>
-          <a:fontRef idx="minor">
-            <a:schemeClr val="lt1"/>
-          </a:fontRef>
-        </p:style>
-        <p:txBody>
-          <a:bodyPr rtlCol="0" anchor="ctr"/>
-          <a:lstStyle/>
-          <a:p>
-            <a:pPr algn="ctr"/>
-          </a:p>
-        </p:txBody>
-      </p:sp>
-      <p:sp>
-        <p:nvSpPr>
-          <p:cNvPr id="12" name="TextBox 11"/>
-          <p:cNvSpPr txBox="1"/>
-          <p:nvPr/>
-        </p:nvSpPr>
-        <p:spPr>
-          <a:xfrm>
-            <a:off x="868680" y="4709160"/>
-            <a:ext cx="10241280" cy="1005840"/>
-          </a:xfrm>
-          <a:prstGeom prst="rect">
-            <a:avLst/>
-          </a:prstGeom>
-          <a:noFill/>
-        </p:spPr>
-        <p:txBody>
-          <a:bodyPr wrap="square">
-            <a:spAutoFit/>
-          </a:bodyPr>
-          <a:lstStyle/>
-          <a:p>
-            <a:pPr>
-              <a:spcAft>
-                <a:spcPts val="500"/>
-              </a:spcAft>
-            </a:pPr>
-            <a:r>
-              <a:rPr sz="1400" b="1">
-                <a:solidFill>
-                  <a:srgbClr val="0A0A0A"/>
-                </a:solidFill>
-                <a:latin typeface="Calibri"/>
-              </a:rPr>
-              <a:t>What you’ll leave with today</a:t>
-            </a:r>
-          </a:p>
-          <a:p>
-            <a:pPr>
-              <a:spcAft>
-                <a:spcPts val="500"/>
-              </a:spcAft>
-            </a:pPr>
-            <a:r>
-              <a:rPr sz="1500" b="0">
-                <a:solidFill>
-                  <a:srgbClr val="5A6472"/>
-                </a:solidFill>
-                <a:latin typeface="Calibri"/>
-              </a:rPr>
-              <a:t>A clear view of whether CodSphere fits — and, if it does, the smallest next step (diagnostic, storefront, or a clean no).</a:t>
-            </a:r>
-          </a:p>
-        </p:txBody>
-      </p:sp>
-      <p:sp>
-        <p:nvSpPr>
-          <p:cNvPr id="13" name="TextBox 12"/>
-          <p:cNvSpPr txBox="1"/>
-          <p:nvPr/>
-        </p:nvSpPr>
-        <p:spPr>
-          <a:xfrm>
-            <a:off x="640080" y="6446520"/>
-            <a:ext cx="7315200" cy="274320"/>
-          </a:xfrm>
-          <a:prstGeom prst="rect">
-            <a:avLst/>
-          </a:prstGeom>
-          <a:noFill/>
-        </p:spPr>
-        <p:txBody>
-          <a:bodyPr wrap="none">
-            <a:spAutoFit/>
-          </a:bodyPr>
-          <a:lstStyle/>
-          <a:p>
-            <a:r>
-              <a:rPr sz="1100" b="0">
-                <a:solidFill>
-                  <a:srgbClr val="5A6472"/>
-                </a:solidFill>
-                <a:latin typeface="Calibri"/>
-              </a:rPr>
-              <a:t>CodSphere</a:t>
-            </a:r>
-          </a:p>
-        </p:txBody>
-      </p:sp>
-      <p:sp>
-        <p:nvSpPr>
-          <p:cNvPr id="14" name="TextBox 13"/>
-          <p:cNvSpPr txBox="1"/>
-          <p:nvPr/>
-        </p:nvSpPr>
-        <p:spPr>
-          <a:xfrm>
-            <a:off x="10424160" y="6446520"/>
-            <a:ext cx="1280160" cy="274320"/>
-          </a:xfrm>
-          <a:prstGeom prst="rect">
-            <a:avLst/>
-          </a:prstGeom>
-          <a:noFill/>
-        </p:spPr>
-        <p:txBody>
-          <a:bodyPr wrap="none">
-            <a:spAutoFit/>
-          </a:bodyPr>
-          <a:lstStyle/>
-          <a:p>
-            <a:pPr algn="r"/>
-            <a:r>
-              <a:rPr sz="1100" b="0">
-                <a:solidFill>
-                  <a:srgbClr val="5A6472"/>
-                </a:solidFill>
-                <a:latin typeface="Calibri"/>
-              </a:rPr>
-              <a:t>1 / 8</a:t>
+              <a:rPr sz="1200" b="0">
+                <a:solidFill>
+                  <a:srgbClr val="33FCFE"/>
+                </a:solidFill>
+                <a:latin typeface="Calibri"/>
+              </a:rPr>
+              <a:t>www.codsphere.com  ·  (604) 906-2693  ·  info@codsphere.ca</a:t>
             </a:r>
           </a:p>
         </p:txBody>
@@ -3716,7 +3497,7 @@
         <p:spPr>
           <a:xfrm>
             <a:off x="0" y="0"/>
-            <a:ext cx="12191695" cy="73152"/>
+            <a:ext cx="12191695" cy="54864"/>
           </a:xfrm>
           <a:prstGeom prst="rect">
             <a:avLst/>
@@ -3759,7 +3540,7 @@
         <p:spPr>
           <a:xfrm>
             <a:off x="5943600" y="0"/>
-            <a:ext cx="6248095" cy="73152"/>
+            <a:ext cx="6248095" cy="54864"/>
           </a:xfrm>
           <a:prstGeom prst="rect">
             <a:avLst/>
@@ -3801,8 +3582,8 @@
         </p:nvSpPr>
         <p:spPr>
           <a:xfrm>
-            <a:off x="640080" y="457200"/>
-            <a:ext cx="10972800" cy="320040"/>
+            <a:off x="640080" y="411480"/>
+            <a:ext cx="10972800" cy="274320"/>
           </a:xfrm>
           <a:prstGeom prst="rect">
             <a:avLst/>
@@ -3818,7 +3599,7 @@
             <a:r>
               <a:rPr sz="1200" b="1">
                 <a:solidFill>
-                  <a:srgbClr val="0664A7"/>
+                  <a:srgbClr val="010B66"/>
                 </a:solidFill>
                 <a:latin typeface="Calibri"/>
               </a:rPr>
@@ -3835,8 +3616,8 @@
         </p:nvSpPr>
         <p:spPr>
           <a:xfrm>
-            <a:off x="640080" y="822960"/>
-            <a:ext cx="10972800" cy="1188720"/>
+            <a:off x="640080" y="731520"/>
+            <a:ext cx="10972800" cy="1097280"/>
           </a:xfrm>
           <a:prstGeom prst="rect">
             <a:avLst/>
@@ -3850,7 +3631,7 @@
           <a:lstStyle/>
           <a:p>
             <a:r>
-              <a:rPr sz="3000" b="1">
+              <a:rPr sz="2800" b="1">
                 <a:solidFill>
                   <a:srgbClr val="0A0A0A"/>
                 </a:solidFill>
@@ -3869,8 +3650,8 @@
         </p:nvSpPr>
         <p:spPr>
           <a:xfrm>
-            <a:off x="640080" y="2286000"/>
-            <a:ext cx="3520440" cy="2926080"/>
+            <a:off x="640080" y="2194560"/>
+            <a:ext cx="3520440" cy="3017520"/>
           </a:xfrm>
           <a:prstGeom prst="roundRect">
             <a:avLst>
@@ -3878,11 +3659,11 @@
             </a:avLst>
           </a:prstGeom>
           <a:solidFill>
-            <a:srgbClr val="F6F7F9"/>
+            <a:srgbClr val="F3F4F6"/>
           </a:solidFill>
           <a:ln w="12700">
             <a:solidFill>
-              <a:srgbClr val="E8EAED"/>
+              <a:srgbClr val="E5E7EB"/>
             </a:solidFill>
           </a:ln>
         </p:spPr>
@@ -3916,8 +3697,8 @@
         </p:nvSpPr>
         <p:spPr>
           <a:xfrm>
-            <a:off x="868680" y="2468880"/>
-            <a:ext cx="3063240" cy="2560320"/>
+            <a:off x="868680" y="2377440"/>
+            <a:ext cx="3063240" cy="2651760"/>
           </a:xfrm>
           <a:prstGeom prst="rect">
             <a:avLst/>
@@ -3938,7 +3719,7 @@
             <a:r>
               <a:rPr sz="1200" b="1">
                 <a:solidFill>
-                  <a:srgbClr val="0664A7"/>
+                  <a:srgbClr val="010B66"/>
                 </a:solidFill>
                 <a:latin typeface="Calibri"/>
               </a:rPr>
@@ -3970,7 +3751,7 @@
             <a:r>
               <a:rPr sz="1500" b="0">
                 <a:solidFill>
-                  <a:srgbClr val="5A6472"/>
+                  <a:srgbClr val="6B7280"/>
                 </a:solidFill>
                 <a:latin typeface="Calibri"/>
               </a:rPr>
@@ -3987,8 +3768,8 @@
         </p:nvSpPr>
         <p:spPr>
           <a:xfrm>
-            <a:off x="4389120" y="2286000"/>
-            <a:ext cx="3520440" cy="2926080"/>
+            <a:off x="4389120" y="2194560"/>
+            <a:ext cx="3520440" cy="3017520"/>
           </a:xfrm>
           <a:prstGeom prst="roundRect">
             <a:avLst>
@@ -3996,11 +3777,11 @@
             </a:avLst>
           </a:prstGeom>
           <a:solidFill>
-            <a:srgbClr val="F6F7F9"/>
+            <a:srgbClr val="F3F4F6"/>
           </a:solidFill>
           <a:ln w="12700">
             <a:solidFill>
-              <a:srgbClr val="E8EAED"/>
+              <a:srgbClr val="E5E7EB"/>
             </a:solidFill>
           </a:ln>
         </p:spPr>
@@ -4034,8 +3815,8 @@
         </p:nvSpPr>
         <p:spPr>
           <a:xfrm>
-            <a:off x="4617720" y="2468880"/>
-            <a:ext cx="3063240" cy="2560320"/>
+            <a:off x="4617720" y="2377440"/>
+            <a:ext cx="3063240" cy="2651760"/>
           </a:xfrm>
           <a:prstGeom prst="rect">
             <a:avLst/>
@@ -4056,7 +3837,7 @@
             <a:r>
               <a:rPr sz="1200" b="1">
                 <a:solidFill>
-                  <a:srgbClr val="0664A7"/>
+                  <a:srgbClr val="010B66"/>
                 </a:solidFill>
                 <a:latin typeface="Calibri"/>
               </a:rPr>
@@ -4088,7 +3869,7 @@
             <a:r>
               <a:rPr sz="1500" b="0">
                 <a:solidFill>
-                  <a:srgbClr val="5A6472"/>
+                  <a:srgbClr val="6B7280"/>
                 </a:solidFill>
                 <a:latin typeface="Calibri"/>
               </a:rPr>
@@ -4105,8 +3886,8 @@
         </p:nvSpPr>
         <p:spPr>
           <a:xfrm>
-            <a:off x="8138159" y="2286000"/>
-            <a:ext cx="3520440" cy="2926080"/>
+            <a:off x="8138159" y="2194560"/>
+            <a:ext cx="3520440" cy="3017520"/>
           </a:xfrm>
           <a:prstGeom prst="roundRect">
             <a:avLst>
@@ -4114,11 +3895,11 @@
             </a:avLst>
           </a:prstGeom>
           <a:solidFill>
-            <a:srgbClr val="F6F7F9"/>
+            <a:srgbClr val="F3F4F6"/>
           </a:solidFill>
           <a:ln w="12700">
             <a:solidFill>
-              <a:srgbClr val="E8EAED"/>
+              <a:srgbClr val="E5E7EB"/>
             </a:solidFill>
           </a:ln>
         </p:spPr>
@@ -4152,8 +3933,8 @@
         </p:nvSpPr>
         <p:spPr>
           <a:xfrm>
-            <a:off x="8366759" y="2468880"/>
-            <a:ext cx="3063240" cy="2560320"/>
+            <a:off x="8366759" y="2377440"/>
+            <a:ext cx="3063240" cy="2651760"/>
           </a:xfrm>
           <a:prstGeom prst="rect">
             <a:avLst/>
@@ -4174,7 +3955,7 @@
             <a:r>
               <a:rPr sz="1200" b="1">
                 <a:solidFill>
-                  <a:srgbClr val="0664A7"/>
+                  <a:srgbClr val="010B66"/>
                 </a:solidFill>
                 <a:latin typeface="Calibri"/>
               </a:rPr>
@@ -4206,11 +3987,11 @@
             <a:r>
               <a:rPr sz="1500" b="0">
                 <a:solidFill>
-                  <a:srgbClr val="5A6472"/>
-                </a:solidFill>
-                <a:latin typeface="Calibri"/>
-              </a:rPr>
-              <a:t>The smallest useful engagement — or an honest “not for you” if we shouldn’t work together.</a:t>
+                  <a:srgbClr val="6B7280"/>
+                </a:solidFill>
+                <a:latin typeface="Calibri"/>
+              </a:rPr>
+              <a:t>The smallest useful engagement — or an honest “not for you.”</a:t>
             </a:r>
           </a:p>
         </p:txBody>
@@ -4223,8 +4004,8 @@
         </p:nvSpPr>
         <p:spPr>
           <a:xfrm>
-            <a:off x="640080" y="5577840"/>
-            <a:ext cx="10972800" cy="1005840"/>
+            <a:off x="640080" y="5486400"/>
+            <a:ext cx="10972800" cy="914400"/>
           </a:xfrm>
           <a:prstGeom prst="rect">
             <a:avLst/>
@@ -4238,9 +4019,9 @@
           <a:lstStyle/>
           <a:p>
             <a:r>
-              <a:rPr sz="1500" b="0">
-                <a:solidFill>
-                  <a:srgbClr val="5A6472"/>
+              <a:rPr sz="1400" b="0">
+                <a:solidFill>
+                  <a:srgbClr val="6B7280"/>
                 </a:solidFill>
                 <a:latin typeface="Calibri"/>
               </a:rPr>
@@ -4251,14 +4032,81 @@
       </p:sp>
       <p:sp>
         <p:nvSpPr>
-          <p:cNvPr id="14" name="TextBox 13"/>
+          <p:cNvPr id="14" name="Rectangle 13"/>
+          <p:cNvSpPr/>
+          <p:nvPr/>
+        </p:nvSpPr>
+        <p:spPr>
+          <a:xfrm>
+            <a:off x="640080" y="6355080"/>
+            <a:ext cx="10881360" cy="9144"/>
+          </a:xfrm>
+          <a:prstGeom prst="rect">
+            <a:avLst/>
+          </a:prstGeom>
+          <a:solidFill>
+            <a:srgbClr val="E5E7EB"/>
+          </a:solidFill>
+          <a:ln>
+            <a:noFill/>
+          </a:ln>
+        </p:spPr>
+        <p:style>
+          <a:lnRef idx="1">
+            <a:schemeClr val="accent1"/>
+          </a:lnRef>
+          <a:fillRef idx="3">
+            <a:schemeClr val="accent1"/>
+          </a:fillRef>
+          <a:effectRef idx="2">
+            <a:schemeClr val="accent1"/>
+          </a:effectRef>
+          <a:fontRef idx="minor">
+            <a:schemeClr val="lt1"/>
+          </a:fontRef>
+        </p:style>
+        <p:txBody>
+          <a:bodyPr rtlCol="0" anchor="ctr"/>
+          <a:lstStyle/>
+          <a:p>
+            <a:pPr algn="ctr"/>
+          </a:p>
+        </p:txBody>
+      </p:sp>
+      <p:pic>
+        <p:nvPicPr>
+          <p:cNvPr id="15" name="Picture 14" descr="logo-black.png"/>
+          <p:cNvPicPr>
+            <a:picLocks noChangeAspect="1"/>
+          </p:cNvPicPr>
+          <p:nvPr/>
+        </p:nvPicPr>
+        <p:blipFill>
+          <a:blip r:embed="rId2"/>
+          <a:stretch>
+            <a:fillRect/>
+          </a:stretch>
+        </p:blipFill>
+        <p:spPr>
+          <a:xfrm>
+            <a:off x="640080" y="6446520"/>
+            <a:ext cx="804672" cy="201168"/>
+          </a:xfrm>
+          <a:prstGeom prst="rect">
+            <a:avLst/>
+          </a:prstGeom>
+        </p:spPr>
+      </p:pic>
+      <p:sp>
+        <p:nvSpPr>
+          <p:cNvPr id="16" name="TextBox 15"/>
           <p:cNvSpPr txBox="1"/>
           <p:nvPr/>
         </p:nvSpPr>
         <p:spPr>
           <a:xfrm>
-            <a:off x="640080" y="6446520"/>
-            <a:ext cx="7315200" cy="274320"/>
+            <a:off x="4114800" y="6446520"/>
+            <a:ext cx="4114800" cy="274320"/>
           </a:xfrm>
           <a:prstGeom prst="rect">
             <a:avLst/>
@@ -4271,21 +4119,22 @@
           </a:bodyPr>
           <a:lstStyle/>
           <a:p>
+            <a:pPr algn="ctr"/>
             <a:r>
               <a:rPr sz="1100" b="0">
                 <a:solidFill>
-                  <a:srgbClr val="5A6472"/>
-                </a:solidFill>
-                <a:latin typeface="Calibri"/>
-              </a:rPr>
-              <a:t>CodSphere</a:t>
-            </a:r>
-          </a:p>
-        </p:txBody>
-      </p:sp>
-      <p:sp>
-        <p:nvSpPr>
-          <p:cNvPr id="15" name="TextBox 14"/>
+                  <a:srgbClr val="6B7280"/>
+                </a:solidFill>
+                <a:latin typeface="Calibri"/>
+              </a:rPr>
+              <a:t>www.codsphere.com</a:t>
+            </a:r>
+          </a:p>
+        </p:txBody>
+      </p:sp>
+      <p:sp>
+        <p:nvSpPr>
+          <p:cNvPr id="17" name="TextBox 16"/>
           <p:cNvSpPr txBox="1"/>
           <p:nvPr/>
         </p:nvSpPr>
@@ -4309,7 +4158,7 @@
             <a:r>
               <a:rPr sz="1100" b="0">
                 <a:solidFill>
-                  <a:srgbClr val="5A6472"/>
+                  <a:srgbClr val="6B7280"/>
                 </a:solidFill>
                 <a:latin typeface="Calibri"/>
               </a:rPr>
@@ -4388,7 +4237,7 @@
         <p:spPr>
           <a:xfrm>
             <a:off x="0" y="0"/>
-            <a:ext cx="12191695" cy="73152"/>
+            <a:ext cx="12191695" cy="54864"/>
           </a:xfrm>
           <a:prstGeom prst="rect">
             <a:avLst/>
@@ -4431,7 +4280,7 @@
         <p:spPr>
           <a:xfrm>
             <a:off x="5943600" y="0"/>
-            <a:ext cx="6248095" cy="73152"/>
+            <a:ext cx="6248095" cy="54864"/>
           </a:xfrm>
           <a:prstGeom prst="rect">
             <a:avLst/>
@@ -4473,8 +4322,8 @@
         </p:nvSpPr>
         <p:spPr>
           <a:xfrm>
-            <a:off x="640080" y="457200"/>
-            <a:ext cx="10972800" cy="320040"/>
+            <a:off x="640080" y="411480"/>
+            <a:ext cx="10972800" cy="274320"/>
           </a:xfrm>
           <a:prstGeom prst="rect">
             <a:avLst/>
@@ -4490,7 +4339,7 @@
             <a:r>
               <a:rPr sz="1200" b="1">
                 <a:solidFill>
-                  <a:srgbClr val="0664A7"/>
+                  <a:srgbClr val="010B66"/>
                 </a:solidFill>
                 <a:latin typeface="Calibri"/>
               </a:rPr>
@@ -4507,8 +4356,8 @@
         </p:nvSpPr>
         <p:spPr>
           <a:xfrm>
-            <a:off x="640080" y="822960"/>
-            <a:ext cx="10972800" cy="1188720"/>
+            <a:off x="640080" y="731520"/>
+            <a:ext cx="10972800" cy="1097280"/>
           </a:xfrm>
           <a:prstGeom prst="rect">
             <a:avLst/>
@@ -4522,7 +4371,7 @@
           <a:lstStyle/>
           <a:p>
             <a:r>
-              <a:rPr sz="3400" b="1">
+              <a:rPr sz="3200" b="1">
                 <a:solidFill>
                   <a:srgbClr val="0A0A0A"/>
                 </a:solidFill>
@@ -4542,7 +4391,7 @@
         </p:nvSpPr>
         <p:spPr>
           <a:xfrm>
-            <a:off x="640080" y="2331720"/>
+            <a:off x="640080" y="2286000"/>
             <a:ext cx="5212080" cy="2286000"/>
           </a:xfrm>
           <a:prstGeom prst="roundRect">
@@ -4551,11 +4400,11 @@
             </a:avLst>
           </a:prstGeom>
           <a:solidFill>
-            <a:srgbClr val="F6F7F9"/>
+            <a:srgbClr val="F3F4F6"/>
           </a:solidFill>
           <a:ln w="12700">
             <a:solidFill>
-              <a:srgbClr val="E8EAED"/>
+              <a:srgbClr val="E5E7EB"/>
             </a:solidFill>
           </a:ln>
         </p:spPr>
@@ -4589,7 +4438,7 @@
         </p:nvSpPr>
         <p:spPr>
           <a:xfrm>
-            <a:off x="868680" y="2514600"/>
+            <a:off x="868680" y="2468880"/>
             <a:ext cx="4754880" cy="1920240"/>
           </a:xfrm>
           <a:prstGeom prst="rect">
@@ -4627,7 +4476,7 @@
             <a:r>
               <a:rPr sz="1500" b="0">
                 <a:solidFill>
-                  <a:srgbClr val="5A6472"/>
+                  <a:srgbClr val="6B7280"/>
                 </a:solidFill>
                 <a:latin typeface="Calibri"/>
               </a:rPr>
@@ -4644,7 +4493,7 @@
         </p:nvSpPr>
         <p:spPr>
           <a:xfrm>
-            <a:off x="6126480" y="2331720"/>
+            <a:off x="6126480" y="2286000"/>
             <a:ext cx="5212080" cy="2286000"/>
           </a:xfrm>
           <a:prstGeom prst="roundRect">
@@ -4653,11 +4502,11 @@
             </a:avLst>
           </a:prstGeom>
           <a:solidFill>
-            <a:srgbClr val="F6F7F9"/>
+            <a:srgbClr val="F3F4F6"/>
           </a:solidFill>
           <a:ln w="12700">
             <a:solidFill>
-              <a:srgbClr val="E8EAED"/>
+              <a:srgbClr val="E5E7EB"/>
             </a:solidFill>
           </a:ln>
         </p:spPr>
@@ -4691,7 +4540,7 @@
         </p:nvSpPr>
         <p:spPr>
           <a:xfrm>
-            <a:off x="6355080" y="2514600"/>
+            <a:off x="6355080" y="2468880"/>
             <a:ext cx="4754880" cy="1920240"/>
           </a:xfrm>
           <a:prstGeom prst="rect">
@@ -4729,7 +4578,7 @@
             <a:r>
               <a:rPr sz="1500" b="0">
                 <a:solidFill>
-                  <a:srgbClr val="5A6472"/>
+                  <a:srgbClr val="6B7280"/>
                 </a:solidFill>
                 <a:latin typeface="Calibri"/>
               </a:rPr>
@@ -4746,8 +4595,8 @@
         </p:nvSpPr>
         <p:spPr>
           <a:xfrm>
-            <a:off x="640080" y="4846320"/>
-            <a:ext cx="10698480" cy="960120"/>
+            <a:off x="640080" y="4800600"/>
+            <a:ext cx="10698480" cy="914400"/>
           </a:xfrm>
           <a:prstGeom prst="roundRect">
             <a:avLst>
@@ -4755,11 +4604,11 @@
             </a:avLst>
           </a:prstGeom>
           <a:solidFill>
-            <a:srgbClr val="F6F7F9"/>
+            <a:srgbClr val="F3F4F6"/>
           </a:solidFill>
           <a:ln w="12700">
             <a:solidFill>
-              <a:srgbClr val="E8EAED"/>
+              <a:srgbClr val="E5E7EB"/>
             </a:solidFill>
           </a:ln>
         </p:spPr>
@@ -4793,8 +4642,8 @@
         </p:nvSpPr>
         <p:spPr>
           <a:xfrm>
-            <a:off x="868680" y="4983480"/>
-            <a:ext cx="10241280" cy="731520"/>
+            <a:off x="868680" y="4937760"/>
+            <a:ext cx="10241280" cy="685800"/>
           </a:xfrm>
           <a:prstGeom prst="rect">
             <a:avLst/>
@@ -4819,21 +4668,88 @@
                 </a:solidFill>
                 <a:latin typeface="Calibri"/>
               </a:rPr>
-              <a:t>The gap: selling and fulfilling custom work live in different places — so information gets lost between the first conversation and the finished job.</a:t>
-            </a:r>
-          </a:p>
-        </p:txBody>
-      </p:sp>
-      <p:sp>
-        <p:nvSpPr>
-          <p:cNvPr id="13" name="TextBox 12"/>
+              <a:t>The gap: selling and fulfilling custom work live in different places.</a:t>
+            </a:r>
+          </a:p>
+        </p:txBody>
+      </p:sp>
+      <p:sp>
+        <p:nvSpPr>
+          <p:cNvPr id="13" name="Rectangle 12"/>
+          <p:cNvSpPr/>
+          <p:nvPr/>
+        </p:nvSpPr>
+        <p:spPr>
+          <a:xfrm>
+            <a:off x="640080" y="6355080"/>
+            <a:ext cx="10881360" cy="9144"/>
+          </a:xfrm>
+          <a:prstGeom prst="rect">
+            <a:avLst/>
+          </a:prstGeom>
+          <a:solidFill>
+            <a:srgbClr val="E5E7EB"/>
+          </a:solidFill>
+          <a:ln>
+            <a:noFill/>
+          </a:ln>
+        </p:spPr>
+        <p:style>
+          <a:lnRef idx="1">
+            <a:schemeClr val="accent1"/>
+          </a:lnRef>
+          <a:fillRef idx="3">
+            <a:schemeClr val="accent1"/>
+          </a:fillRef>
+          <a:effectRef idx="2">
+            <a:schemeClr val="accent1"/>
+          </a:effectRef>
+          <a:fontRef idx="minor">
+            <a:schemeClr val="lt1"/>
+          </a:fontRef>
+        </p:style>
+        <p:txBody>
+          <a:bodyPr rtlCol="0" anchor="ctr"/>
+          <a:lstStyle/>
+          <a:p>
+            <a:pPr algn="ctr"/>
+          </a:p>
+        </p:txBody>
+      </p:sp>
+      <p:pic>
+        <p:nvPicPr>
+          <p:cNvPr id="14" name="Picture 13" descr="logo-black.png"/>
+          <p:cNvPicPr>
+            <a:picLocks noChangeAspect="1"/>
+          </p:cNvPicPr>
+          <p:nvPr/>
+        </p:nvPicPr>
+        <p:blipFill>
+          <a:blip r:embed="rId2"/>
+          <a:stretch>
+            <a:fillRect/>
+          </a:stretch>
+        </p:blipFill>
+        <p:spPr>
+          <a:xfrm>
+            <a:off x="640080" y="6446520"/>
+            <a:ext cx="804672" cy="201168"/>
+          </a:xfrm>
+          <a:prstGeom prst="rect">
+            <a:avLst/>
+          </a:prstGeom>
+        </p:spPr>
+      </p:pic>
+      <p:sp>
+        <p:nvSpPr>
+          <p:cNvPr id="15" name="TextBox 14"/>
           <p:cNvSpPr txBox="1"/>
           <p:nvPr/>
         </p:nvSpPr>
         <p:spPr>
           <a:xfrm>
-            <a:off x="640080" y="6446520"/>
-            <a:ext cx="7315200" cy="274320"/>
+            <a:off x="4114800" y="6446520"/>
+            <a:ext cx="4114800" cy="274320"/>
           </a:xfrm>
           <a:prstGeom prst="rect">
             <a:avLst/>
@@ -4846,21 +4762,22 @@
           </a:bodyPr>
           <a:lstStyle/>
           <a:p>
+            <a:pPr algn="ctr"/>
             <a:r>
               <a:rPr sz="1100" b="0">
                 <a:solidFill>
-                  <a:srgbClr val="5A6472"/>
-                </a:solidFill>
-                <a:latin typeface="Calibri"/>
-              </a:rPr>
-              <a:t>CodSphere</a:t>
-            </a:r>
-          </a:p>
-        </p:txBody>
-      </p:sp>
-      <p:sp>
-        <p:nvSpPr>
-          <p:cNvPr id="14" name="TextBox 13"/>
+                  <a:srgbClr val="6B7280"/>
+                </a:solidFill>
+                <a:latin typeface="Calibri"/>
+              </a:rPr>
+              <a:t>www.codsphere.com</a:t>
+            </a:r>
+          </a:p>
+        </p:txBody>
+      </p:sp>
+      <p:sp>
+        <p:nvSpPr>
+          <p:cNvPr id="16" name="TextBox 15"/>
           <p:cNvSpPr txBox="1"/>
           <p:nvPr/>
         </p:nvSpPr>
@@ -4884,7 +4801,7 @@
             <a:r>
               <a:rPr sz="1100" b="0">
                 <a:solidFill>
-                  <a:srgbClr val="5A6472"/>
+                  <a:srgbClr val="6B7280"/>
                 </a:solidFill>
                 <a:latin typeface="Calibri"/>
               </a:rPr>
@@ -4963,7 +4880,7 @@
         <p:spPr>
           <a:xfrm>
             <a:off x="0" y="0"/>
-            <a:ext cx="12191695" cy="73152"/>
+            <a:ext cx="12191695" cy="54864"/>
           </a:xfrm>
           <a:prstGeom prst="rect">
             <a:avLst/>
@@ -5006,7 +4923,7 @@
         <p:spPr>
           <a:xfrm>
             <a:off x="5943600" y="0"/>
-            <a:ext cx="6248095" cy="73152"/>
+            <a:ext cx="6248095" cy="54864"/>
           </a:xfrm>
           <a:prstGeom prst="rect">
             <a:avLst/>
@@ -5048,8 +4965,8 @@
         </p:nvSpPr>
         <p:spPr>
           <a:xfrm>
-            <a:off x="640080" y="457200"/>
-            <a:ext cx="10972800" cy="320040"/>
+            <a:off x="640080" y="411480"/>
+            <a:ext cx="10972800" cy="274320"/>
           </a:xfrm>
           <a:prstGeom prst="rect">
             <a:avLst/>
@@ -5065,7 +4982,7 @@
             <a:r>
               <a:rPr sz="1200" b="1">
                 <a:solidFill>
-                  <a:srgbClr val="0664A7"/>
+                  <a:srgbClr val="010B66"/>
                 </a:solidFill>
                 <a:latin typeface="Calibri"/>
               </a:rPr>
@@ -5082,8 +4999,8 @@
         </p:nvSpPr>
         <p:spPr>
           <a:xfrm>
-            <a:off x="640080" y="822960"/>
-            <a:ext cx="10972800" cy="1188720"/>
+            <a:off x="640080" y="731520"/>
+            <a:ext cx="10972800" cy="1097280"/>
           </a:xfrm>
           <a:prstGeom prst="rect">
             <a:avLst/>
@@ -5097,7 +5014,7 @@
           <a:lstStyle/>
           <a:p>
             <a:r>
-              <a:rPr sz="3200" b="1">
+              <a:rPr sz="3000" b="1">
                 <a:solidFill>
                   <a:srgbClr val="0A0A0A"/>
                 </a:solidFill>
@@ -5117,7 +5034,7 @@
         <p:spPr>
           <a:xfrm>
             <a:off x="640080" y="1783080"/>
-            <a:ext cx="10972800" cy="1005840"/>
+            <a:ext cx="10972800" cy="914400"/>
           </a:xfrm>
           <a:prstGeom prst="rect">
             <a:avLst/>
@@ -5131,9 +5048,9 @@
           <a:lstStyle/>
           <a:p>
             <a:r>
-              <a:rPr sz="1700" b="0">
-                <a:solidFill>
-                  <a:srgbClr val="5A6472"/>
+              <a:rPr sz="1600" b="0">
+                <a:solidFill>
+                  <a:srgbClr val="6B7280"/>
                 </a:solidFill>
                 <a:latin typeface="Calibri"/>
               </a:rPr>
@@ -5151,7 +5068,7 @@
         <p:spPr>
           <a:xfrm>
             <a:off x="640080" y="2468880"/>
-            <a:ext cx="5029200" cy="3200400"/>
+            <a:ext cx="5029200" cy="3108960"/>
           </a:xfrm>
           <a:prstGeom prst="roundRect">
             <a:avLst>
@@ -5161,7 +5078,7 @@
           <a:solidFill>
             <a:srgbClr val="010B66"/>
           </a:solidFill>
-          <a:ln w="12700">
+          <a:ln>
             <a:noFill/>
           </a:ln>
         </p:spPr>
@@ -5196,7 +5113,7 @@
         <p:spPr>
           <a:xfrm>
             <a:off x="868680" y="2651760"/>
-            <a:ext cx="4572000" cy="2834640"/>
+            <a:ext cx="4572000" cy="2743200"/>
           </a:xfrm>
           <a:prstGeom prst="rect">
             <a:avLst/>
@@ -5299,7 +5216,7 @@
         <p:spPr>
           <a:xfrm>
             <a:off x="5943600" y="2468880"/>
-            <a:ext cx="5577840" cy="3200400"/>
+            <a:ext cx="5577840" cy="3108960"/>
           </a:xfrm>
           <a:prstGeom prst="roundRect">
             <a:avLst>
@@ -5307,11 +5224,11 @@
             </a:avLst>
           </a:prstGeom>
           <a:solidFill>
-            <a:srgbClr val="F6F7F9"/>
+            <a:srgbClr val="F3F4F6"/>
           </a:solidFill>
           <a:ln w="12700">
             <a:solidFill>
-              <a:srgbClr val="E8EAED"/>
+              <a:srgbClr val="E5E7EB"/>
             </a:solidFill>
           </a:ln>
         </p:spPr>
@@ -5346,7 +5263,7 @@
         <p:spPr>
           <a:xfrm>
             <a:off x="6172200" y="2651760"/>
-            <a:ext cx="5120640" cy="2834640"/>
+            <a:ext cx="5120640" cy="2743200"/>
           </a:xfrm>
           <a:prstGeom prst="rect">
             <a:avLst/>
@@ -5383,7 +5300,7 @@
             <a:r>
               <a:rPr sz="1400" b="0">
                 <a:solidFill>
-                  <a:srgbClr val="5A6472"/>
+                  <a:srgbClr val="6B7280"/>
                 </a:solidFill>
                 <a:latin typeface="Calibri"/>
               </a:rPr>
@@ -5399,7 +5316,7 @@
             <a:r>
               <a:rPr sz="1400" b="0">
                 <a:solidFill>
-                  <a:srgbClr val="5A6472"/>
+                  <a:srgbClr val="6B7280"/>
                 </a:solidFill>
                 <a:latin typeface="Calibri"/>
               </a:rPr>
@@ -5415,7 +5332,7 @@
             <a:r>
               <a:rPr sz="1400" b="0">
                 <a:solidFill>
-                  <a:srgbClr val="5A6472"/>
+                  <a:srgbClr val="6B7280"/>
                 </a:solidFill>
                 <a:latin typeface="Calibri"/>
               </a:rPr>
@@ -5431,7 +5348,7 @@
             <a:r>
               <a:rPr sz="1400" b="0">
                 <a:solidFill>
-                  <a:srgbClr val="5A6472"/>
+                  <a:srgbClr val="6B7280"/>
                 </a:solidFill>
                 <a:latin typeface="Calibri"/>
               </a:rPr>
@@ -5447,11 +5364,11 @@
             <a:r>
               <a:rPr sz="1400" b="0">
                 <a:solidFill>
-                  <a:srgbClr val="5A6472"/>
-                </a:solidFill>
-                <a:latin typeface="Calibri"/>
-              </a:rPr>
-              <a:t>• Promo, apparel, and decoration</a:t>
+                  <a:srgbClr val="6B7280"/>
+                </a:solidFill>
+                <a:latin typeface="Calibri"/>
+              </a:rPr>
+              <a:t>• Promo, apparel, and fabrication</a:t>
             </a:r>
           </a:p>
           <a:p>
@@ -5461,13 +5378,13 @@
               </a:spcAft>
             </a:pPr>
             <a:r>
-              <a:rPr sz="1400" b="0">
-                <a:solidFill>
-                  <a:srgbClr val="5A6472"/>
-                </a:solidFill>
-                <a:latin typeface="Calibri"/>
-              </a:rPr>
-              <a:t>• Custom fabrication and made-to-order commerce</a:t>
+              <a:rPr sz="400" b="0">
+                <a:solidFill>
+                  <a:srgbClr val="6B7280"/>
+                </a:solidFill>
+                <a:latin typeface="Calibri"/>
+              </a:rPr>
+              <a:t/>
             </a:r>
           </a:p>
           <a:p>
@@ -5477,22 +5394,6 @@
               </a:spcAft>
             </a:pPr>
             <a:r>
-              <a:rPr sz="400" b="0">
-                <a:solidFill>
-                  <a:srgbClr val="5A6472"/>
-                </a:solidFill>
-                <a:latin typeface="Calibri"/>
-              </a:rPr>
-              <a:t/>
-            </a:r>
-          </a:p>
-          <a:p>
-            <a:pPr>
-              <a:spcAft>
-                <a:spcPts val="500"/>
-              </a:spcAft>
-            </a:pPr>
-            <a:r>
               <a:rPr sz="1300" b="1">
                 <a:solidFill>
                   <a:srgbClr val="0A0A0A"/>
@@ -5506,14 +5407,81 @@
       </p:sp>
       <p:sp>
         <p:nvSpPr>
-          <p:cNvPr id="12" name="TextBox 11"/>
+          <p:cNvPr id="12" name="Rectangle 11"/>
+          <p:cNvSpPr/>
+          <p:nvPr/>
+        </p:nvSpPr>
+        <p:spPr>
+          <a:xfrm>
+            <a:off x="640080" y="6355080"/>
+            <a:ext cx="10881360" cy="9144"/>
+          </a:xfrm>
+          <a:prstGeom prst="rect">
+            <a:avLst/>
+          </a:prstGeom>
+          <a:solidFill>
+            <a:srgbClr val="E5E7EB"/>
+          </a:solidFill>
+          <a:ln>
+            <a:noFill/>
+          </a:ln>
+        </p:spPr>
+        <p:style>
+          <a:lnRef idx="1">
+            <a:schemeClr val="accent1"/>
+          </a:lnRef>
+          <a:fillRef idx="3">
+            <a:schemeClr val="accent1"/>
+          </a:fillRef>
+          <a:effectRef idx="2">
+            <a:schemeClr val="accent1"/>
+          </a:effectRef>
+          <a:fontRef idx="minor">
+            <a:schemeClr val="lt1"/>
+          </a:fontRef>
+        </p:style>
+        <p:txBody>
+          <a:bodyPr rtlCol="0" anchor="ctr"/>
+          <a:lstStyle/>
+          <a:p>
+            <a:pPr algn="ctr"/>
+          </a:p>
+        </p:txBody>
+      </p:sp>
+      <p:pic>
+        <p:nvPicPr>
+          <p:cNvPr id="13" name="Picture 12" descr="logo-black.png"/>
+          <p:cNvPicPr>
+            <a:picLocks noChangeAspect="1"/>
+          </p:cNvPicPr>
+          <p:nvPr/>
+        </p:nvPicPr>
+        <p:blipFill>
+          <a:blip r:embed="rId2"/>
+          <a:stretch>
+            <a:fillRect/>
+          </a:stretch>
+        </p:blipFill>
+        <p:spPr>
+          <a:xfrm>
+            <a:off x="640080" y="6446520"/>
+            <a:ext cx="804672" cy="201168"/>
+          </a:xfrm>
+          <a:prstGeom prst="rect">
+            <a:avLst/>
+          </a:prstGeom>
+        </p:spPr>
+      </p:pic>
+      <p:sp>
+        <p:nvSpPr>
+          <p:cNvPr id="14" name="TextBox 13"/>
           <p:cNvSpPr txBox="1"/>
           <p:nvPr/>
         </p:nvSpPr>
         <p:spPr>
           <a:xfrm>
-            <a:off x="640080" y="6446520"/>
-            <a:ext cx="7315200" cy="274320"/>
+            <a:off x="4114800" y="6446520"/>
+            <a:ext cx="4114800" cy="274320"/>
           </a:xfrm>
           <a:prstGeom prst="rect">
             <a:avLst/>
@@ -5526,21 +5494,22 @@
           </a:bodyPr>
           <a:lstStyle/>
           <a:p>
+            <a:pPr algn="ctr"/>
             <a:r>
               <a:rPr sz="1100" b="0">
                 <a:solidFill>
-                  <a:srgbClr val="5A6472"/>
-                </a:solidFill>
-                <a:latin typeface="Calibri"/>
-              </a:rPr>
-              <a:t>CodSphere</a:t>
-            </a:r>
-          </a:p>
-        </p:txBody>
-      </p:sp>
-      <p:sp>
-        <p:nvSpPr>
-          <p:cNvPr id="13" name="TextBox 12"/>
+                  <a:srgbClr val="6B7280"/>
+                </a:solidFill>
+                <a:latin typeface="Calibri"/>
+              </a:rPr>
+              <a:t>www.codsphere.com</a:t>
+            </a:r>
+          </a:p>
+        </p:txBody>
+      </p:sp>
+      <p:sp>
+        <p:nvSpPr>
+          <p:cNvPr id="15" name="TextBox 14"/>
           <p:cNvSpPr txBox="1"/>
           <p:nvPr/>
         </p:nvSpPr>
@@ -5564,7 +5533,7 @@
             <a:r>
               <a:rPr sz="1100" b="0">
                 <a:solidFill>
-                  <a:srgbClr val="5A6472"/>
+                  <a:srgbClr val="6B7280"/>
                 </a:solidFill>
                 <a:latin typeface="Calibri"/>
               </a:rPr>
@@ -5643,7 +5612,7 @@
         <p:spPr>
           <a:xfrm>
             <a:off x="0" y="0"/>
-            <a:ext cx="12191695" cy="73152"/>
+            <a:ext cx="12191695" cy="54864"/>
           </a:xfrm>
           <a:prstGeom prst="rect">
             <a:avLst/>
@@ -5686,7 +5655,7 @@
         <p:spPr>
           <a:xfrm>
             <a:off x="5943600" y="0"/>
-            <a:ext cx="6248095" cy="73152"/>
+            <a:ext cx="6248095" cy="54864"/>
           </a:xfrm>
           <a:prstGeom prst="rect">
             <a:avLst/>
@@ -5728,8 +5697,8 @@
         </p:nvSpPr>
         <p:spPr>
           <a:xfrm>
-            <a:off x="640080" y="457200"/>
-            <a:ext cx="10972800" cy="320040"/>
+            <a:off x="640080" y="411480"/>
+            <a:ext cx="10972800" cy="274320"/>
           </a:xfrm>
           <a:prstGeom prst="rect">
             <a:avLst/>
@@ -5745,7 +5714,7 @@
             <a:r>
               <a:rPr sz="1200" b="1">
                 <a:solidFill>
-                  <a:srgbClr val="0664A7"/>
+                  <a:srgbClr val="010B66"/>
                 </a:solidFill>
                 <a:latin typeface="Calibri"/>
               </a:rPr>
@@ -5762,8 +5731,8 @@
         </p:nvSpPr>
         <p:spPr>
           <a:xfrm>
-            <a:off x="640080" y="822960"/>
-            <a:ext cx="10972800" cy="1188720"/>
+            <a:off x="640080" y="731520"/>
+            <a:ext cx="10972800" cy="1097280"/>
           </a:xfrm>
           <a:prstGeom prst="rect">
             <a:avLst/>
@@ -5777,7 +5746,7 @@
           <a:lstStyle/>
           <a:p>
             <a:r>
-              <a:rPr sz="3200" b="1">
+              <a:rPr sz="3000" b="1">
                 <a:solidFill>
                   <a:srgbClr val="0A0A0A"/>
                 </a:solidFill>
@@ -5796,7 +5765,7 @@
         </p:nvSpPr>
         <p:spPr>
           <a:xfrm>
-            <a:off x="640080" y="2240280"/>
+            <a:off x="640080" y="2194560"/>
             <a:ext cx="3383280" cy="3108960"/>
           </a:xfrm>
           <a:prstGeom prst="roundRect">
@@ -5805,11 +5774,11 @@
             </a:avLst>
           </a:prstGeom>
           <a:solidFill>
-            <a:srgbClr val="F6F7F9"/>
+            <a:srgbClr val="F3F4F6"/>
           </a:solidFill>
           <a:ln w="12700">
             <a:solidFill>
-              <a:srgbClr val="E8EAED"/>
+              <a:srgbClr val="E5E7EB"/>
             </a:solidFill>
           </a:ln>
         </p:spPr>
@@ -5843,7 +5812,7 @@
         </p:nvSpPr>
         <p:spPr>
           <a:xfrm>
-            <a:off x="868680" y="2423160"/>
+            <a:off x="868680" y="2377440"/>
             <a:ext cx="2926080" cy="2743200"/>
           </a:xfrm>
           <a:prstGeom prst="rect">
@@ -5865,7 +5834,7 @@
             <a:r>
               <a:rPr sz="1200" b="1">
                 <a:solidFill>
-                  <a:srgbClr val="0664A7"/>
+                  <a:srgbClr val="010B66"/>
                 </a:solidFill>
                 <a:latin typeface="Calibri"/>
               </a:rPr>
@@ -5897,7 +5866,7 @@
             <a:r>
               <a:rPr sz="1400" b="0">
                 <a:solidFill>
-                  <a:srgbClr val="5A6472"/>
+                  <a:srgbClr val="6B7280"/>
                 </a:solidFill>
                 <a:latin typeface="Calibri"/>
               </a:rPr>
@@ -5914,7 +5883,7 @@
         </p:nvSpPr>
         <p:spPr>
           <a:xfrm>
-            <a:off x="4297680" y="2240280"/>
+            <a:off x="4297680" y="2194560"/>
             <a:ext cx="3383280" cy="3108960"/>
           </a:xfrm>
           <a:prstGeom prst="roundRect">
@@ -5923,11 +5892,11 @@
             </a:avLst>
           </a:prstGeom>
           <a:solidFill>
-            <a:srgbClr val="F6F7F9"/>
+            <a:srgbClr val="F3F4F6"/>
           </a:solidFill>
           <a:ln w="12700">
             <a:solidFill>
-              <a:srgbClr val="E8EAED"/>
+              <a:srgbClr val="E5E7EB"/>
             </a:solidFill>
           </a:ln>
         </p:spPr>
@@ -5961,7 +5930,7 @@
         </p:nvSpPr>
         <p:spPr>
           <a:xfrm>
-            <a:off x="4526280" y="2423160"/>
+            <a:off x="4526280" y="2377440"/>
             <a:ext cx="2926080" cy="2743200"/>
           </a:xfrm>
           <a:prstGeom prst="rect">
@@ -5983,7 +5952,7 @@
             <a:r>
               <a:rPr sz="1200" b="1">
                 <a:solidFill>
-                  <a:srgbClr val="0664A7"/>
+                  <a:srgbClr val="010B66"/>
                 </a:solidFill>
                 <a:latin typeface="Calibri"/>
               </a:rPr>
@@ -6015,7 +5984,7 @@
             <a:r>
               <a:rPr sz="1400" b="0">
                 <a:solidFill>
-                  <a:srgbClr val="5A6472"/>
+                  <a:srgbClr val="6B7280"/>
                 </a:solidFill>
                 <a:latin typeface="Calibri"/>
               </a:rPr>
@@ -6032,7 +6001,7 @@
         </p:nvSpPr>
         <p:spPr>
           <a:xfrm>
-            <a:off x="7955279" y="2240280"/>
+            <a:off x="7955279" y="2194560"/>
             <a:ext cx="3383280" cy="3108960"/>
           </a:xfrm>
           <a:prstGeom prst="roundRect">
@@ -6041,11 +6010,11 @@
             </a:avLst>
           </a:prstGeom>
           <a:solidFill>
-            <a:srgbClr val="F6F7F9"/>
+            <a:srgbClr val="F3F4F6"/>
           </a:solidFill>
           <a:ln w="12700">
             <a:solidFill>
-              <a:srgbClr val="E8EAED"/>
+              <a:srgbClr val="E5E7EB"/>
             </a:solidFill>
           </a:ln>
         </p:spPr>
@@ -6079,7 +6048,7 @@
         </p:nvSpPr>
         <p:spPr>
           <a:xfrm>
-            <a:off x="8183879" y="2423160"/>
+            <a:off x="8183879" y="2377440"/>
             <a:ext cx="2926080" cy="2743200"/>
           </a:xfrm>
           <a:prstGeom prst="rect">
@@ -6101,7 +6070,7 @@
             <a:r>
               <a:rPr sz="1200" b="1">
                 <a:solidFill>
-                  <a:srgbClr val="0664A7"/>
+                  <a:srgbClr val="010B66"/>
                 </a:solidFill>
                 <a:latin typeface="Calibri"/>
               </a:rPr>
@@ -6133,7 +6102,7 @@
             <a:r>
               <a:rPr sz="1400" b="0">
                 <a:solidFill>
-                  <a:srgbClr val="5A6472"/>
+                  <a:srgbClr val="6B7280"/>
                 </a:solidFill>
                 <a:latin typeface="Calibri"/>
               </a:rPr>
@@ -6150,8 +6119,8 @@
         </p:nvSpPr>
         <p:spPr>
           <a:xfrm>
-            <a:off x="640080" y="5623560"/>
-            <a:ext cx="10972800" cy="1005840"/>
+            <a:off x="640080" y="5532120"/>
+            <a:ext cx="10972800" cy="914400"/>
           </a:xfrm>
           <a:prstGeom prst="rect">
             <a:avLst/>
@@ -6165,9 +6134,9 @@
           <a:lstStyle/>
           <a:p>
             <a:r>
-              <a:rPr sz="1400" b="0">
-                <a:solidFill>
-                  <a:srgbClr val="5A6472"/>
+              <a:rPr sz="1300" b="0">
+                <a:solidFill>
+                  <a:srgbClr val="6B7280"/>
                 </a:solidFill>
                 <a:latin typeface="Calibri"/>
               </a:rPr>
@@ -6178,14 +6147,81 @@
       </p:sp>
       <p:sp>
         <p:nvSpPr>
-          <p:cNvPr id="14" name="TextBox 13"/>
+          <p:cNvPr id="14" name="Rectangle 13"/>
+          <p:cNvSpPr/>
+          <p:nvPr/>
+        </p:nvSpPr>
+        <p:spPr>
+          <a:xfrm>
+            <a:off x="640080" y="6355080"/>
+            <a:ext cx="10881360" cy="9144"/>
+          </a:xfrm>
+          <a:prstGeom prst="rect">
+            <a:avLst/>
+          </a:prstGeom>
+          <a:solidFill>
+            <a:srgbClr val="E5E7EB"/>
+          </a:solidFill>
+          <a:ln>
+            <a:noFill/>
+          </a:ln>
+        </p:spPr>
+        <p:style>
+          <a:lnRef idx="1">
+            <a:schemeClr val="accent1"/>
+          </a:lnRef>
+          <a:fillRef idx="3">
+            <a:schemeClr val="accent1"/>
+          </a:fillRef>
+          <a:effectRef idx="2">
+            <a:schemeClr val="accent1"/>
+          </a:effectRef>
+          <a:fontRef idx="minor">
+            <a:schemeClr val="lt1"/>
+          </a:fontRef>
+        </p:style>
+        <p:txBody>
+          <a:bodyPr rtlCol="0" anchor="ctr"/>
+          <a:lstStyle/>
+          <a:p>
+            <a:pPr algn="ctr"/>
+          </a:p>
+        </p:txBody>
+      </p:sp>
+      <p:pic>
+        <p:nvPicPr>
+          <p:cNvPr id="15" name="Picture 14" descr="logo-black.png"/>
+          <p:cNvPicPr>
+            <a:picLocks noChangeAspect="1"/>
+          </p:cNvPicPr>
+          <p:nvPr/>
+        </p:nvPicPr>
+        <p:blipFill>
+          <a:blip r:embed="rId2"/>
+          <a:stretch>
+            <a:fillRect/>
+          </a:stretch>
+        </p:blipFill>
+        <p:spPr>
+          <a:xfrm>
+            <a:off x="640080" y="6446520"/>
+            <a:ext cx="804672" cy="201168"/>
+          </a:xfrm>
+          <a:prstGeom prst="rect">
+            <a:avLst/>
+          </a:prstGeom>
+        </p:spPr>
+      </p:pic>
+      <p:sp>
+        <p:nvSpPr>
+          <p:cNvPr id="16" name="TextBox 15"/>
           <p:cNvSpPr txBox="1"/>
           <p:nvPr/>
         </p:nvSpPr>
         <p:spPr>
           <a:xfrm>
-            <a:off x="640080" y="6446520"/>
-            <a:ext cx="7315200" cy="274320"/>
+            <a:off x="4114800" y="6446520"/>
+            <a:ext cx="4114800" cy="274320"/>
           </a:xfrm>
           <a:prstGeom prst="rect">
             <a:avLst/>
@@ -6198,21 +6234,22 @@
           </a:bodyPr>
           <a:lstStyle/>
           <a:p>
+            <a:pPr algn="ctr"/>
             <a:r>
               <a:rPr sz="1100" b="0">
                 <a:solidFill>
-                  <a:srgbClr val="5A6472"/>
-                </a:solidFill>
-                <a:latin typeface="Calibri"/>
-              </a:rPr>
-              <a:t>CodSphere</a:t>
-            </a:r>
-          </a:p>
-        </p:txBody>
-      </p:sp>
-      <p:sp>
-        <p:nvSpPr>
-          <p:cNvPr id="15" name="TextBox 14"/>
+                  <a:srgbClr val="6B7280"/>
+                </a:solidFill>
+                <a:latin typeface="Calibri"/>
+              </a:rPr>
+              <a:t>www.codsphere.com</a:t>
+            </a:r>
+          </a:p>
+        </p:txBody>
+      </p:sp>
+      <p:sp>
+        <p:nvSpPr>
+          <p:cNvPr id="17" name="TextBox 16"/>
           <p:cNvSpPr txBox="1"/>
           <p:nvPr/>
         </p:nvSpPr>
@@ -6236,7 +6273,7 @@
             <a:r>
               <a:rPr sz="1100" b="0">
                 <a:solidFill>
-                  <a:srgbClr val="5A6472"/>
+                  <a:srgbClr val="6B7280"/>
                 </a:solidFill>
                 <a:latin typeface="Calibri"/>
               </a:rPr>
@@ -6315,7 +6352,7 @@
         <p:spPr>
           <a:xfrm>
             <a:off x="0" y="0"/>
-            <a:ext cx="12191695" cy="73152"/>
+            <a:ext cx="12191695" cy="54864"/>
           </a:xfrm>
           <a:prstGeom prst="rect">
             <a:avLst/>
@@ -6358,7 +6395,7 @@
         <p:spPr>
           <a:xfrm>
             <a:off x="5943600" y="0"/>
-            <a:ext cx="6248095" cy="73152"/>
+            <a:ext cx="6248095" cy="54864"/>
           </a:xfrm>
           <a:prstGeom prst="rect">
             <a:avLst/>
@@ -6400,8 +6437,8 @@
         </p:nvSpPr>
         <p:spPr>
           <a:xfrm>
-            <a:off x="640080" y="457200"/>
-            <a:ext cx="10972800" cy="320040"/>
+            <a:off x="640080" y="411480"/>
+            <a:ext cx="10972800" cy="274320"/>
           </a:xfrm>
           <a:prstGeom prst="rect">
             <a:avLst/>
@@ -6417,7 +6454,7 @@
             <a:r>
               <a:rPr sz="1200" b="1">
                 <a:solidFill>
-                  <a:srgbClr val="0664A7"/>
+                  <a:srgbClr val="010B66"/>
                 </a:solidFill>
                 <a:latin typeface="Calibri"/>
               </a:rPr>
@@ -6434,8 +6471,8 @@
         </p:nvSpPr>
         <p:spPr>
           <a:xfrm>
-            <a:off x="640080" y="822960"/>
-            <a:ext cx="10972800" cy="1188720"/>
+            <a:off x="640080" y="731520"/>
+            <a:ext cx="10972800" cy="1097280"/>
           </a:xfrm>
           <a:prstGeom prst="rect">
             <a:avLst/>
@@ -6449,7 +6486,7 @@
           <a:lstStyle/>
           <a:p>
             <a:r>
-              <a:rPr sz="3200" b="1">
+              <a:rPr sz="3000" b="1">
                 <a:solidFill>
                   <a:srgbClr val="0A0A0A"/>
                 </a:solidFill>
@@ -6477,11 +6514,11 @@
             </a:avLst>
           </a:prstGeom>
           <a:solidFill>
-            <a:srgbClr val="F6F7F9"/>
+            <a:srgbClr val="F3F4F6"/>
           </a:solidFill>
           <a:ln w="12700">
             <a:solidFill>
-              <a:srgbClr val="E8EAED"/>
+              <a:srgbClr val="E5E7EB"/>
             </a:solidFill>
           </a:ln>
         </p:spPr>
@@ -6553,7 +6590,7 @@
             <a:r>
               <a:rPr sz="1200" b="0">
                 <a:solidFill>
-                  <a:srgbClr val="5A6472"/>
+                  <a:srgbClr val="6B7280"/>
                 </a:solidFill>
                 <a:latin typeface="Calibri"/>
               </a:rPr>
@@ -6569,7 +6606,7 @@
             <a:r>
               <a:rPr sz="600" b="0">
                 <a:solidFill>
-                  <a:srgbClr val="5A6472"/>
+                  <a:srgbClr val="6B7280"/>
                 </a:solidFill>
                 <a:latin typeface="Calibri"/>
               </a:rPr>
@@ -6601,7 +6638,7 @@
             <a:r>
               <a:rPr sz="1100" b="0">
                 <a:solidFill>
-                  <a:srgbClr val="5A6472"/>
+                  <a:srgbClr val="6B7280"/>
                 </a:solidFill>
                 <a:latin typeface="Calibri"/>
               </a:rPr>
@@ -6627,11 +6664,11 @@
             </a:avLst>
           </a:prstGeom>
           <a:solidFill>
-            <a:srgbClr val="F6F7F9"/>
+            <a:srgbClr val="F3F4F6"/>
           </a:solidFill>
           <a:ln w="12700">
             <a:solidFill>
-              <a:srgbClr val="E8EAED"/>
+              <a:srgbClr val="E5E7EB"/>
             </a:solidFill>
           </a:ln>
         </p:spPr>
@@ -6703,7 +6740,7 @@
             <a:r>
               <a:rPr sz="1200" b="0">
                 <a:solidFill>
-                  <a:srgbClr val="5A6472"/>
+                  <a:srgbClr val="6B7280"/>
                 </a:solidFill>
                 <a:latin typeface="Calibri"/>
               </a:rPr>
@@ -6719,7 +6756,7 @@
             <a:r>
               <a:rPr sz="600" b="0">
                 <a:solidFill>
-                  <a:srgbClr val="5A6472"/>
+                  <a:srgbClr val="6B7280"/>
                 </a:solidFill>
                 <a:latin typeface="Calibri"/>
               </a:rPr>
@@ -6751,7 +6788,7 @@
             <a:r>
               <a:rPr sz="1100" b="0">
                 <a:solidFill>
-                  <a:srgbClr val="5A6472"/>
+                  <a:srgbClr val="6B7280"/>
                 </a:solidFill>
                 <a:latin typeface="Calibri"/>
               </a:rPr>
@@ -6777,11 +6814,11 @@
             </a:avLst>
           </a:prstGeom>
           <a:solidFill>
-            <a:srgbClr val="F6F7F9"/>
+            <a:srgbClr val="F3F4F6"/>
           </a:solidFill>
           <a:ln w="12700">
             <a:solidFill>
-              <a:srgbClr val="E8EAED"/>
+              <a:srgbClr val="E5E7EB"/>
             </a:solidFill>
           </a:ln>
         </p:spPr>
@@ -6853,7 +6890,7 @@
             <a:r>
               <a:rPr sz="1200" b="0">
                 <a:solidFill>
-                  <a:srgbClr val="5A6472"/>
+                  <a:srgbClr val="6B7280"/>
                 </a:solidFill>
                 <a:latin typeface="Calibri"/>
               </a:rPr>
@@ -6869,7 +6906,7 @@
             <a:r>
               <a:rPr sz="600" b="0">
                 <a:solidFill>
-                  <a:srgbClr val="5A6472"/>
+                  <a:srgbClr val="6B7280"/>
                 </a:solidFill>
                 <a:latin typeface="Calibri"/>
               </a:rPr>
@@ -6901,7 +6938,7 @@
             <a:r>
               <a:rPr sz="1100" b="0">
                 <a:solidFill>
-                  <a:srgbClr val="5A6472"/>
+                  <a:srgbClr val="6B7280"/>
                 </a:solidFill>
                 <a:latin typeface="Calibri"/>
               </a:rPr>
@@ -6927,11 +6964,11 @@
             </a:avLst>
           </a:prstGeom>
           <a:solidFill>
-            <a:srgbClr val="F6F7F9"/>
+            <a:srgbClr val="F3F4F6"/>
           </a:solidFill>
           <a:ln w="12700">
             <a:solidFill>
-              <a:srgbClr val="E8EAED"/>
+              <a:srgbClr val="E5E7EB"/>
             </a:solidFill>
           </a:ln>
         </p:spPr>
@@ -7003,7 +7040,7 @@
             <a:r>
               <a:rPr sz="1200" b="0">
                 <a:solidFill>
-                  <a:srgbClr val="5A6472"/>
+                  <a:srgbClr val="6B7280"/>
                 </a:solidFill>
                 <a:latin typeface="Calibri"/>
               </a:rPr>
@@ -7019,7 +7056,7 @@
             <a:r>
               <a:rPr sz="600" b="0">
                 <a:solidFill>
-                  <a:srgbClr val="5A6472"/>
+                  <a:srgbClr val="6B7280"/>
                 </a:solidFill>
                 <a:latin typeface="Calibri"/>
               </a:rPr>
@@ -7051,7 +7088,7 @@
             <a:r>
               <a:rPr sz="1100" b="0">
                 <a:solidFill>
-                  <a:srgbClr val="5A6472"/>
+                  <a:srgbClr val="6B7280"/>
                 </a:solidFill>
                 <a:latin typeface="Calibri"/>
               </a:rPr>
@@ -7068,8 +7105,8 @@
         </p:nvSpPr>
         <p:spPr>
           <a:xfrm>
-            <a:off x="640080" y="5623560"/>
-            <a:ext cx="10972800" cy="1005840"/>
+            <a:off x="640080" y="5532120"/>
+            <a:ext cx="10972800" cy="914400"/>
           </a:xfrm>
           <a:prstGeom prst="rect">
             <a:avLst/>
@@ -7083,9 +7120,9 @@
           <a:lstStyle/>
           <a:p>
             <a:r>
-              <a:rPr sz="1300" b="0">
-                <a:solidFill>
-                  <a:srgbClr val="5A6472"/>
+              <a:rPr sz="1200" b="0">
+                <a:solidFill>
+                  <a:srgbClr val="6B7280"/>
                 </a:solidFill>
                 <a:latin typeface="Calibri"/>
               </a:rPr>
@@ -7096,14 +7133,81 @@
       </p:sp>
       <p:sp>
         <p:nvSpPr>
-          <p:cNvPr id="16" name="TextBox 15"/>
+          <p:cNvPr id="16" name="Rectangle 15"/>
+          <p:cNvSpPr/>
+          <p:nvPr/>
+        </p:nvSpPr>
+        <p:spPr>
+          <a:xfrm>
+            <a:off x="640080" y="6355080"/>
+            <a:ext cx="10881360" cy="9144"/>
+          </a:xfrm>
+          <a:prstGeom prst="rect">
+            <a:avLst/>
+          </a:prstGeom>
+          <a:solidFill>
+            <a:srgbClr val="E5E7EB"/>
+          </a:solidFill>
+          <a:ln>
+            <a:noFill/>
+          </a:ln>
+        </p:spPr>
+        <p:style>
+          <a:lnRef idx="1">
+            <a:schemeClr val="accent1"/>
+          </a:lnRef>
+          <a:fillRef idx="3">
+            <a:schemeClr val="accent1"/>
+          </a:fillRef>
+          <a:effectRef idx="2">
+            <a:schemeClr val="accent1"/>
+          </a:effectRef>
+          <a:fontRef idx="minor">
+            <a:schemeClr val="lt1"/>
+          </a:fontRef>
+        </p:style>
+        <p:txBody>
+          <a:bodyPr rtlCol="0" anchor="ctr"/>
+          <a:lstStyle/>
+          <a:p>
+            <a:pPr algn="ctr"/>
+          </a:p>
+        </p:txBody>
+      </p:sp>
+      <p:pic>
+        <p:nvPicPr>
+          <p:cNvPr id="17" name="Picture 16" descr="logo-black.png"/>
+          <p:cNvPicPr>
+            <a:picLocks noChangeAspect="1"/>
+          </p:cNvPicPr>
+          <p:nvPr/>
+        </p:nvPicPr>
+        <p:blipFill>
+          <a:blip r:embed="rId2"/>
+          <a:stretch>
+            <a:fillRect/>
+          </a:stretch>
+        </p:blipFill>
+        <p:spPr>
+          <a:xfrm>
+            <a:off x="640080" y="6446520"/>
+            <a:ext cx="804672" cy="201168"/>
+          </a:xfrm>
+          <a:prstGeom prst="rect">
+            <a:avLst/>
+          </a:prstGeom>
+        </p:spPr>
+      </p:pic>
+      <p:sp>
+        <p:nvSpPr>
+          <p:cNvPr id="18" name="TextBox 17"/>
           <p:cNvSpPr txBox="1"/>
           <p:nvPr/>
         </p:nvSpPr>
         <p:spPr>
           <a:xfrm>
-            <a:off x="640080" y="6446520"/>
-            <a:ext cx="7315200" cy="274320"/>
+            <a:off x="4114800" y="6446520"/>
+            <a:ext cx="4114800" cy="274320"/>
           </a:xfrm>
           <a:prstGeom prst="rect">
             <a:avLst/>
@@ -7116,21 +7220,22 @@
           </a:bodyPr>
           <a:lstStyle/>
           <a:p>
+            <a:pPr algn="ctr"/>
             <a:r>
               <a:rPr sz="1100" b="0">
                 <a:solidFill>
-                  <a:srgbClr val="5A6472"/>
-                </a:solidFill>
-                <a:latin typeface="Calibri"/>
-              </a:rPr>
-              <a:t>CodSphere</a:t>
-            </a:r>
-          </a:p>
-        </p:txBody>
-      </p:sp>
-      <p:sp>
-        <p:nvSpPr>
-          <p:cNvPr id="17" name="TextBox 16"/>
+                  <a:srgbClr val="6B7280"/>
+                </a:solidFill>
+                <a:latin typeface="Calibri"/>
+              </a:rPr>
+              <a:t>www.codsphere.com</a:t>
+            </a:r>
+          </a:p>
+        </p:txBody>
+      </p:sp>
+      <p:sp>
+        <p:nvSpPr>
+          <p:cNvPr id="19" name="TextBox 18"/>
           <p:cNvSpPr txBox="1"/>
           <p:nvPr/>
         </p:nvSpPr>
@@ -7154,7 +7259,7 @@
             <a:r>
               <a:rPr sz="1100" b="0">
                 <a:solidFill>
-                  <a:srgbClr val="5A6472"/>
+                  <a:srgbClr val="6B7280"/>
                 </a:solidFill>
                 <a:latin typeface="Calibri"/>
               </a:rPr>
@@ -7233,7 +7338,7 @@
         <p:spPr>
           <a:xfrm>
             <a:off x="0" y="0"/>
-            <a:ext cx="12191695" cy="73152"/>
+            <a:ext cx="12191695" cy="54864"/>
           </a:xfrm>
           <a:prstGeom prst="rect">
             <a:avLst/>
@@ -7276,7 +7381,7 @@
         <p:spPr>
           <a:xfrm>
             <a:off x="5943600" y="0"/>
-            <a:ext cx="6248095" cy="73152"/>
+            <a:ext cx="6248095" cy="54864"/>
           </a:xfrm>
           <a:prstGeom prst="rect">
             <a:avLst/>
@@ -7318,8 +7423,8 @@
         </p:nvSpPr>
         <p:spPr>
           <a:xfrm>
-            <a:off x="640080" y="457200"/>
-            <a:ext cx="10972800" cy="320040"/>
+            <a:off x="640080" y="411480"/>
+            <a:ext cx="10972800" cy="274320"/>
           </a:xfrm>
           <a:prstGeom prst="rect">
             <a:avLst/>
@@ -7335,7 +7440,7 @@
             <a:r>
               <a:rPr sz="1200" b="1">
                 <a:solidFill>
-                  <a:srgbClr val="0664A7"/>
+                  <a:srgbClr val="010B66"/>
                 </a:solidFill>
                 <a:latin typeface="Calibri"/>
               </a:rPr>
@@ -7352,8 +7457,8 @@
         </p:nvSpPr>
         <p:spPr>
           <a:xfrm>
-            <a:off x="640080" y="822960"/>
-            <a:ext cx="10972800" cy="1188720"/>
+            <a:off x="640080" y="731520"/>
+            <a:ext cx="10972800" cy="1097280"/>
           </a:xfrm>
           <a:prstGeom prst="rect">
             <a:avLst/>
@@ -7367,7 +7472,7 @@
           <a:lstStyle/>
           <a:p>
             <a:r>
-              <a:rPr sz="3000" b="1">
+              <a:rPr sz="2800" b="1">
                 <a:solidFill>
                   <a:srgbClr val="0A0A0A"/>
                 </a:solidFill>
@@ -7386,8 +7491,8 @@
         </p:nvSpPr>
         <p:spPr>
           <a:xfrm>
-            <a:off x="640080" y="2194560"/>
-            <a:ext cx="5212080" cy="3017520"/>
+            <a:off x="640080" y="2148840"/>
+            <a:ext cx="5212080" cy="2926080"/>
           </a:xfrm>
           <a:prstGeom prst="roundRect">
             <a:avLst>
@@ -7395,11 +7500,11 @@
             </a:avLst>
           </a:prstGeom>
           <a:solidFill>
-            <a:srgbClr val="F6F7F9"/>
+            <a:srgbClr val="F3F4F6"/>
           </a:solidFill>
           <a:ln w="12700">
             <a:solidFill>
-              <a:srgbClr val="E8EAED"/>
+              <a:srgbClr val="E5E7EB"/>
             </a:solidFill>
           </a:ln>
         </p:spPr>
@@ -7433,8 +7538,8 @@
         </p:nvSpPr>
         <p:spPr>
           <a:xfrm>
-            <a:off x="868680" y="2377440"/>
-            <a:ext cx="4754880" cy="2651760"/>
+            <a:off x="868680" y="2331720"/>
+            <a:ext cx="4754880" cy="2560320"/>
           </a:xfrm>
           <a:prstGeom prst="rect">
             <a:avLst/>
@@ -7455,7 +7560,7 @@
             <a:r>
               <a:rPr sz="1100" b="1">
                 <a:solidFill>
-                  <a:srgbClr val="0664A7"/>
+                  <a:srgbClr val="010B66"/>
                 </a:solidFill>
                 <a:latin typeface="Calibri"/>
               </a:rPr>
@@ -7487,7 +7592,7 @@
             <a:r>
               <a:rPr sz="1400" b="0">
                 <a:solidFill>
-                  <a:srgbClr val="5A6472"/>
+                  <a:srgbClr val="6B7280"/>
                 </a:solidFill>
                 <a:latin typeface="Calibri"/>
               </a:rPr>
@@ -7503,7 +7608,7 @@
             <a:r>
               <a:rPr sz="600" b="0">
                 <a:solidFill>
-                  <a:srgbClr val="5A6472"/>
+                  <a:srgbClr val="6B7280"/>
                 </a:solidFill>
                 <a:latin typeface="Calibri"/>
               </a:rPr>
@@ -7519,7 +7624,7 @@
             <a:r>
               <a:rPr sz="1300" b="0">
                 <a:solidFill>
-                  <a:srgbClr val="5A6472"/>
+                  <a:srgbClr val="6B7280"/>
                 </a:solidFill>
                 <a:latin typeface="Calibri"/>
               </a:rPr>
@@ -7536,8 +7641,8 @@
         </p:nvSpPr>
         <p:spPr>
           <a:xfrm>
-            <a:off x="6126480" y="2194560"/>
-            <a:ext cx="5212080" cy="3017520"/>
+            <a:off x="6126480" y="2148840"/>
+            <a:ext cx="5212080" cy="2926080"/>
           </a:xfrm>
           <a:prstGeom prst="roundRect">
             <a:avLst>
@@ -7545,11 +7650,11 @@
             </a:avLst>
           </a:prstGeom>
           <a:solidFill>
-            <a:srgbClr val="F6F7F9"/>
+            <a:srgbClr val="F3F4F6"/>
           </a:solidFill>
           <a:ln w="12700">
             <a:solidFill>
-              <a:srgbClr val="E8EAED"/>
+              <a:srgbClr val="E5E7EB"/>
             </a:solidFill>
           </a:ln>
         </p:spPr>
@@ -7583,8 +7688,8 @@
         </p:nvSpPr>
         <p:spPr>
           <a:xfrm>
-            <a:off x="6355080" y="2377440"/>
-            <a:ext cx="4754880" cy="2651760"/>
+            <a:off x="6355080" y="2331720"/>
+            <a:ext cx="4754880" cy="2560320"/>
           </a:xfrm>
           <a:prstGeom prst="rect">
             <a:avLst/>
@@ -7605,7 +7710,7 @@
             <a:r>
               <a:rPr sz="1100" b="1">
                 <a:solidFill>
-                  <a:srgbClr val="0664A7"/>
+                  <a:srgbClr val="010B66"/>
                 </a:solidFill>
                 <a:latin typeface="Calibri"/>
               </a:rPr>
@@ -7637,7 +7742,7 @@
             <a:r>
               <a:rPr sz="1400" b="0">
                 <a:solidFill>
-                  <a:srgbClr val="5A6472"/>
+                  <a:srgbClr val="6B7280"/>
                 </a:solidFill>
                 <a:latin typeface="Calibri"/>
               </a:rPr>
@@ -7653,7 +7758,7 @@
             <a:r>
               <a:rPr sz="600" b="0">
                 <a:solidFill>
-                  <a:srgbClr val="5A6472"/>
+                  <a:srgbClr val="6B7280"/>
                 </a:solidFill>
                 <a:latin typeface="Calibri"/>
               </a:rPr>
@@ -7669,7 +7774,7 @@
             <a:r>
               <a:rPr sz="1300" b="0">
                 <a:solidFill>
-                  <a:srgbClr val="5A6472"/>
+                  <a:srgbClr val="6B7280"/>
                 </a:solidFill>
                 <a:latin typeface="Calibri"/>
               </a:rPr>
@@ -7688,8 +7793,8 @@
         </p:nvSpPr>
         <p:spPr>
           <a:xfrm>
-            <a:off x="640080" y="5486400"/>
-            <a:ext cx="3108960" cy="502920"/>
+            <a:off x="640080" y="5349240"/>
+            <a:ext cx="3200400" cy="475488"/>
           </a:xfrm>
           <a:prstGeom prst="roundRect">
             <a:avLst>
@@ -7697,11 +7802,11 @@
             </a:avLst>
           </a:prstGeom>
           <a:solidFill>
-            <a:srgbClr val="FFFFFF"/>
+            <a:srgbClr val="010B66"/>
           </a:solidFill>
-          <a:ln w="19050">
+          <a:ln w="15875">
             <a:solidFill>
-              <a:srgbClr val="010B66"/>
+              <a:srgbClr val="33FCFE"/>
             </a:solidFill>
           </a:ln>
         </p:spPr>
@@ -7720,14 +7825,14 @@
           </a:fontRef>
         </p:style>
         <p:txBody>
-          <a:bodyPr rtlCol="0" anchor="ctr" wrap="none"/>
+          <a:bodyPr rtlCol="0" anchor="ctr"/>
           <a:lstStyle/>
           <a:p>
             <a:pPr algn="ctr"/>
             <a:r>
-              <a:rPr sz="1400" b="1">
-                <a:solidFill>
-                  <a:srgbClr val="010B66"/>
+              <a:rPr sz="1300" b="1">
+                <a:solidFill>
+                  <a:srgbClr val="FFFFFF"/>
                 </a:solidFill>
                 <a:latin typeface="Calibri"/>
               </a:rPr>
@@ -7738,14 +7843,81 @@
       </p:sp>
       <p:sp>
         <p:nvSpPr>
-          <p:cNvPr id="12" name="TextBox 11"/>
+          <p:cNvPr id="12" name="Rectangle 11"/>
+          <p:cNvSpPr/>
+          <p:nvPr/>
+        </p:nvSpPr>
+        <p:spPr>
+          <a:xfrm>
+            <a:off x="640080" y="6355080"/>
+            <a:ext cx="10881360" cy="9144"/>
+          </a:xfrm>
+          <a:prstGeom prst="rect">
+            <a:avLst/>
+          </a:prstGeom>
+          <a:solidFill>
+            <a:srgbClr val="E5E7EB"/>
+          </a:solidFill>
+          <a:ln>
+            <a:noFill/>
+          </a:ln>
+        </p:spPr>
+        <p:style>
+          <a:lnRef idx="1">
+            <a:schemeClr val="accent1"/>
+          </a:lnRef>
+          <a:fillRef idx="3">
+            <a:schemeClr val="accent1"/>
+          </a:fillRef>
+          <a:effectRef idx="2">
+            <a:schemeClr val="accent1"/>
+          </a:effectRef>
+          <a:fontRef idx="minor">
+            <a:schemeClr val="lt1"/>
+          </a:fontRef>
+        </p:style>
+        <p:txBody>
+          <a:bodyPr rtlCol="0" anchor="ctr"/>
+          <a:lstStyle/>
+          <a:p>
+            <a:pPr algn="ctr"/>
+          </a:p>
+        </p:txBody>
+      </p:sp>
+      <p:pic>
+        <p:nvPicPr>
+          <p:cNvPr id="13" name="Picture 12" descr="logo-black.png"/>
+          <p:cNvPicPr>
+            <a:picLocks noChangeAspect="1"/>
+          </p:cNvPicPr>
+          <p:nvPr/>
+        </p:nvPicPr>
+        <p:blipFill>
+          <a:blip r:embed="rId3"/>
+          <a:stretch>
+            <a:fillRect/>
+          </a:stretch>
+        </p:blipFill>
+        <p:spPr>
+          <a:xfrm>
+            <a:off x="640080" y="6446520"/>
+            <a:ext cx="804672" cy="201168"/>
+          </a:xfrm>
+          <a:prstGeom prst="rect">
+            <a:avLst/>
+          </a:prstGeom>
+        </p:spPr>
+      </p:pic>
+      <p:sp>
+        <p:nvSpPr>
+          <p:cNvPr id="14" name="TextBox 13"/>
           <p:cNvSpPr txBox="1"/>
           <p:nvPr/>
         </p:nvSpPr>
         <p:spPr>
           <a:xfrm>
-            <a:off x="640080" y="6446520"/>
-            <a:ext cx="7315200" cy="274320"/>
+            <a:off x="4114800" y="6446520"/>
+            <a:ext cx="4114800" cy="274320"/>
           </a:xfrm>
           <a:prstGeom prst="rect">
             <a:avLst/>
@@ -7758,21 +7930,22 @@
           </a:bodyPr>
           <a:lstStyle/>
           <a:p>
+            <a:pPr algn="ctr"/>
             <a:r>
               <a:rPr sz="1100" b="0">
                 <a:solidFill>
-                  <a:srgbClr val="5A6472"/>
-                </a:solidFill>
-                <a:latin typeface="Calibri"/>
-              </a:rPr>
-              <a:t>CodSphere</a:t>
-            </a:r>
-          </a:p>
-        </p:txBody>
-      </p:sp>
-      <p:sp>
-        <p:nvSpPr>
-          <p:cNvPr id="13" name="TextBox 12"/>
+                  <a:srgbClr val="6B7280"/>
+                </a:solidFill>
+                <a:latin typeface="Calibri"/>
+              </a:rPr>
+              <a:t>www.codsphere.com</a:t>
+            </a:r>
+          </a:p>
+        </p:txBody>
+      </p:sp>
+      <p:sp>
+        <p:nvSpPr>
+          <p:cNvPr id="15" name="TextBox 14"/>
           <p:cNvSpPr txBox="1"/>
           <p:nvPr/>
         </p:nvSpPr>
@@ -7796,7 +7969,7 @@
             <a:r>
               <a:rPr sz="1100" b="0">
                 <a:solidFill>
-                  <a:srgbClr val="5A6472"/>
+                  <a:srgbClr val="6B7280"/>
                 </a:solidFill>
                 <a:latin typeface="Calibri"/>
               </a:rPr>
@@ -7875,7 +8048,7 @@
         <p:spPr>
           <a:xfrm>
             <a:off x="0" y="0"/>
-            <a:ext cx="12191695" cy="73152"/>
+            <a:ext cx="12191695" cy="54864"/>
           </a:xfrm>
           <a:prstGeom prst="rect">
             <a:avLst/>
@@ -7918,7 +8091,7 @@
         <p:spPr>
           <a:xfrm>
             <a:off x="5943600" y="0"/>
-            <a:ext cx="6248095" cy="73152"/>
+            <a:ext cx="6248095" cy="54864"/>
           </a:xfrm>
           <a:prstGeom prst="rect">
             <a:avLst/>
@@ -7960,8 +8133,8 @@
         </p:nvSpPr>
         <p:spPr>
           <a:xfrm>
-            <a:off x="640080" y="457200"/>
-            <a:ext cx="10972800" cy="320040"/>
+            <a:off x="640080" y="411480"/>
+            <a:ext cx="10972800" cy="274320"/>
           </a:xfrm>
           <a:prstGeom prst="rect">
             <a:avLst/>
@@ -7977,7 +8150,7 @@
             <a:r>
               <a:rPr sz="1200" b="1">
                 <a:solidFill>
-                  <a:srgbClr val="0664A7"/>
+                  <a:srgbClr val="010B66"/>
                 </a:solidFill>
                 <a:latin typeface="Calibri"/>
               </a:rPr>
@@ -7994,8 +8167,8 @@
         </p:nvSpPr>
         <p:spPr>
           <a:xfrm>
-            <a:off x="640080" y="822960"/>
-            <a:ext cx="10972800" cy="1188720"/>
+            <a:off x="640080" y="731520"/>
+            <a:ext cx="10972800" cy="1097280"/>
           </a:xfrm>
           <a:prstGeom prst="rect">
             <a:avLst/>
@@ -8009,7 +8182,7 @@
           <a:lstStyle/>
           <a:p>
             <a:r>
-              <a:rPr sz="3400" b="1">
+              <a:rPr sz="3200" b="1">
                 <a:solidFill>
                   <a:srgbClr val="0A0A0A"/>
                 </a:solidFill>
@@ -8030,7 +8203,7 @@
         <p:spPr>
           <a:xfrm>
             <a:off x="640080" y="2194560"/>
-            <a:ext cx="10972800" cy="1005840"/>
+            <a:ext cx="10972800" cy="914400"/>
           </a:xfrm>
           <a:prstGeom prst="rect">
             <a:avLst/>
@@ -8046,11 +8219,11 @@
             <a:r>
               <a:rPr sz="1700" b="0">
                 <a:solidFill>
-                  <a:srgbClr val="5A6472"/>
-                </a:solidFill>
-                <a:latin typeface="Calibri"/>
-              </a:rPr>
-              <a:t>Book 30 minutes. We’ll map how work enters, where it handoffs, and where visibility breaks. Expected outcome: fit + next step (or a clean no).</a:t>
+                  <a:srgbClr val="6B7280"/>
+                </a:solidFill>
+                <a:latin typeface="Calibri"/>
+              </a:rPr>
+              <a:t>Book 30 minutes. Expected outcome: fit + next step — or a clean no.</a:t>
             </a:r>
           </a:p>
         </p:txBody>
@@ -8065,8 +8238,8 @@
         </p:nvSpPr>
         <p:spPr>
           <a:xfrm>
-            <a:off x="640080" y="3337560"/>
-            <a:ext cx="3931920" cy="502920"/>
+            <a:off x="640080" y="3200400"/>
+            <a:ext cx="3657600" cy="475488"/>
           </a:xfrm>
           <a:prstGeom prst="roundRect">
             <a:avLst>
@@ -8076,8 +8249,10 @@
           <a:solidFill>
             <a:srgbClr val="010B66"/>
           </a:solidFill>
-          <a:ln>
-            <a:noFill/>
+          <a:ln w="15875">
+            <a:solidFill>
+              <a:srgbClr val="33FCFE"/>
+            </a:solidFill>
           </a:ln>
         </p:spPr>
         <p:style>
@@ -8095,12 +8270,12 @@
           </a:fontRef>
         </p:style>
         <p:txBody>
-          <a:bodyPr rtlCol="0" anchor="ctr" wrap="none"/>
+          <a:bodyPr rtlCol="0" anchor="ctr"/>
           <a:lstStyle/>
           <a:p>
             <a:pPr algn="ctr"/>
             <a:r>
-              <a:rPr sz="1400" b="1">
+              <a:rPr sz="1300" b="1">
                 <a:solidFill>
                   <a:srgbClr val="FFFFFF"/>
                 </a:solidFill>
@@ -8121,8 +8296,8 @@
         </p:nvSpPr>
         <p:spPr>
           <a:xfrm>
-            <a:off x="4754880" y="3337560"/>
-            <a:ext cx="2926080" cy="502920"/>
+            <a:off x="4480560" y="3200400"/>
+            <a:ext cx="2834640" cy="475488"/>
           </a:xfrm>
           <a:prstGeom prst="roundRect">
             <a:avLst>
@@ -8130,11 +8305,11 @@
             </a:avLst>
           </a:prstGeom>
           <a:solidFill>
-            <a:srgbClr val="FFFFFF"/>
+            <a:srgbClr val="000000"/>
           </a:solidFill>
-          <a:ln w="19050">
+          <a:ln w="15875">
             <a:solidFill>
-              <a:srgbClr val="010B66"/>
+              <a:srgbClr val="33FCFE"/>
             </a:solidFill>
           </a:ln>
         </p:spPr>
@@ -8153,14 +8328,14 @@
           </a:fontRef>
         </p:style>
         <p:txBody>
-          <a:bodyPr rtlCol="0" anchor="ctr" wrap="none"/>
+          <a:bodyPr rtlCol="0" anchor="ctr"/>
           <a:lstStyle/>
           <a:p>
             <a:pPr algn="ctr"/>
             <a:r>
-              <a:rPr sz="1400" b="1">
-                <a:solidFill>
-                  <a:srgbClr val="010B66"/>
+              <a:rPr sz="1300" b="1">
+                <a:solidFill>
+                  <a:srgbClr val="FFFFFF"/>
                 </a:solidFill>
                 <a:latin typeface="Calibri"/>
               </a:rPr>
@@ -8177,8 +8352,8 @@
         </p:nvSpPr>
         <p:spPr>
           <a:xfrm>
-            <a:off x="640080" y="4206240"/>
-            <a:ext cx="10698480" cy="1554480"/>
+            <a:off x="640080" y="4023360"/>
+            <a:ext cx="10698480" cy="1645920"/>
           </a:xfrm>
           <a:prstGeom prst="roundRect">
             <a:avLst>
@@ -8186,11 +8361,11 @@
             </a:avLst>
           </a:prstGeom>
           <a:solidFill>
-            <a:srgbClr val="F6F7F9"/>
+            <a:srgbClr val="F3F4F6"/>
           </a:solidFill>
           <a:ln w="12700">
             <a:solidFill>
-              <a:srgbClr val="E8EAED"/>
+              <a:srgbClr val="E5E7EB"/>
             </a:solidFill>
           </a:ln>
         </p:spPr>
@@ -8224,8 +8399,8 @@
         </p:nvSpPr>
         <p:spPr>
           <a:xfrm>
-            <a:off x="868680" y="4389120"/>
-            <a:ext cx="10241280" cy="1280160"/>
+            <a:off x="868680" y="4206240"/>
+            <a:ext cx="10241280" cy="1371600"/>
           </a:xfrm>
           <a:prstGeom prst="rect">
             <a:avLst/>
@@ -8262,11 +8437,11 @@
             <a:r>
               <a:rPr sz="1500" b="0">
                 <a:solidFill>
-                  <a:srgbClr val="5A6472"/>
-                </a:solidFill>
-                <a:latin typeface="Calibri"/>
-              </a:rPr>
-              <a:t>www.codsphere.com/contact   ·   info@codsphere.ca   ·   (604) 906-2693</a:t>
+                  <a:srgbClr val="6B7280"/>
+                </a:solidFill>
+                <a:latin typeface="Calibri"/>
+              </a:rPr>
+              <a:t>www.codsphere.com/contact  ·  info@codsphere.ca  ·  (604) 906-2693</a:t>
             </a:r>
           </a:p>
           <a:p>
@@ -8278,11 +8453,11 @@
             <a:r>
               <a:rPr sz="1500" b="0">
                 <a:solidFill>
-                  <a:srgbClr val="5A6472"/>
-                </a:solidFill>
-                <a:latin typeface="Calibri"/>
-              </a:rPr>
-              <a:t>Office: Vancouver, BC  ·  Mon–Fri · 09:00–21:00</a:t>
+                  <a:srgbClr val="6B7280"/>
+                </a:solidFill>
+                <a:latin typeface="Calibri"/>
+              </a:rPr>
+              <a:t>Downloads: www.codsphere.com/resources</a:t>
             </a:r>
           </a:p>
           <a:p>
@@ -8292,27 +8467,94 @@
               </a:spcAft>
             </a:pPr>
             <a:r>
-              <a:rPr sz="1300" b="0">
-                <a:solidFill>
-                  <a:srgbClr val="5A6472"/>
-                </a:solidFill>
-                <a:latin typeface="Calibri"/>
-              </a:rPr>
-              <a:t>Download this deck (once live): www.codsphere.com — Resources / Company overview</a:t>
-            </a:r>
-          </a:p>
-        </p:txBody>
-      </p:sp>
-      <p:sp>
-        <p:nvSpPr>
-          <p:cNvPr id="12" name="TextBox 11"/>
+              <a:rPr sz="1400" b="0">
+                <a:solidFill>
+                  <a:srgbClr val="6B7280"/>
+                </a:solidFill>
+                <a:latin typeface="Calibri"/>
+              </a:rPr>
+              <a:t>Vancouver, BC  ·  Mon–Fri · 09:00–21:00</a:t>
+            </a:r>
+          </a:p>
+        </p:txBody>
+      </p:sp>
+      <p:sp>
+        <p:nvSpPr>
+          <p:cNvPr id="12" name="Rectangle 11"/>
+          <p:cNvSpPr/>
+          <p:nvPr/>
+        </p:nvSpPr>
+        <p:spPr>
+          <a:xfrm>
+            <a:off x="640080" y="6355080"/>
+            <a:ext cx="10881360" cy="9144"/>
+          </a:xfrm>
+          <a:prstGeom prst="rect">
+            <a:avLst/>
+          </a:prstGeom>
+          <a:solidFill>
+            <a:srgbClr val="E5E7EB"/>
+          </a:solidFill>
+          <a:ln>
+            <a:noFill/>
+          </a:ln>
+        </p:spPr>
+        <p:style>
+          <a:lnRef idx="1">
+            <a:schemeClr val="accent1"/>
+          </a:lnRef>
+          <a:fillRef idx="3">
+            <a:schemeClr val="accent1"/>
+          </a:fillRef>
+          <a:effectRef idx="2">
+            <a:schemeClr val="accent1"/>
+          </a:effectRef>
+          <a:fontRef idx="minor">
+            <a:schemeClr val="lt1"/>
+          </a:fontRef>
+        </p:style>
+        <p:txBody>
+          <a:bodyPr rtlCol="0" anchor="ctr"/>
+          <a:lstStyle/>
+          <a:p>
+            <a:pPr algn="ctr"/>
+          </a:p>
+        </p:txBody>
+      </p:sp>
+      <p:pic>
+        <p:nvPicPr>
+          <p:cNvPr id="13" name="Picture 12" descr="logo-black.png"/>
+          <p:cNvPicPr>
+            <a:picLocks noChangeAspect="1"/>
+          </p:cNvPicPr>
+          <p:nvPr/>
+        </p:nvPicPr>
+        <p:blipFill>
+          <a:blip r:embed="rId4"/>
+          <a:stretch>
+            <a:fillRect/>
+          </a:stretch>
+        </p:blipFill>
+        <p:spPr>
+          <a:xfrm>
+            <a:off x="640080" y="6446520"/>
+            <a:ext cx="804672" cy="201168"/>
+          </a:xfrm>
+          <a:prstGeom prst="rect">
+            <a:avLst/>
+          </a:prstGeom>
+        </p:spPr>
+      </p:pic>
+      <p:sp>
+        <p:nvSpPr>
+          <p:cNvPr id="14" name="TextBox 13"/>
           <p:cNvSpPr txBox="1"/>
           <p:nvPr/>
         </p:nvSpPr>
         <p:spPr>
           <a:xfrm>
-            <a:off x="640080" y="6446520"/>
-            <a:ext cx="7315200" cy="274320"/>
+            <a:off x="4114800" y="6446520"/>
+            <a:ext cx="4114800" cy="274320"/>
           </a:xfrm>
           <a:prstGeom prst="rect">
             <a:avLst/>
@@ -8325,21 +8567,22 @@
           </a:bodyPr>
           <a:lstStyle/>
           <a:p>
+            <a:pPr algn="ctr"/>
             <a:r>
               <a:rPr sz="1100" b="0">
                 <a:solidFill>
-                  <a:srgbClr val="5A6472"/>
-                </a:solidFill>
-                <a:latin typeface="Calibri"/>
-              </a:rPr>
-              <a:t>CodSphere</a:t>
-            </a:r>
-          </a:p>
-        </p:txBody>
-      </p:sp>
-      <p:sp>
-        <p:nvSpPr>
-          <p:cNvPr id="13" name="TextBox 12"/>
+                  <a:srgbClr val="6B7280"/>
+                </a:solidFill>
+                <a:latin typeface="Calibri"/>
+              </a:rPr>
+              <a:t>www.codsphere.com</a:t>
+            </a:r>
+          </a:p>
+        </p:txBody>
+      </p:sp>
+      <p:sp>
+        <p:nvSpPr>
+          <p:cNvPr id="15" name="TextBox 14"/>
           <p:cNvSpPr txBox="1"/>
           <p:nvPr/>
         </p:nvSpPr>
@@ -8363,7 +8606,7 @@
             <a:r>
               <a:rPr sz="1100" b="0">
                 <a:solidFill>
-                  <a:srgbClr val="5A6472"/>
+                  <a:srgbClr val="6B7280"/>
                 </a:solidFill>
                 <a:latin typeface="Calibri"/>
               </a:rPr>
